--- a/Professional_King_County_EDA_Presentation.pptx
+++ b/Professional_King_County_EDA_Presentation.pptx
@@ -16,9 +16,6 @@
     <p:sldId id="262" r:id="rId11"/>
     <p:sldId id="263" r:id="rId12"/>
     <p:sldId id="264" r:id="rId13"/>
-    <p:sldId id="265" r:id="rId14"/>
-    <p:sldId id="266" r:id="rId15"/>
-    <p:sldId id="267" r:id="rId16"/>
   </p:sldIdLst>
   <p:sldSz cx="12188825" cy="6858000"/>
   <p:notesSz cx="7559675" cy="10691813"/>
@@ -76,7 +73,7 @@
         <p:txBody>
           <a:bodyPr/>
           <a:p>
-            <a:fld id="{A8B6B3ED-67CD-4A28-988A-282B69A3B2D7}" type="slidenum">
+            <a:fld id="{698C4C2F-F167-49D7-B4FA-EE7B8B712F8A}" type="slidenum">
               <a:t>&lt;#&gt;</a:t>
             </a:fld>
           </a:p>
@@ -264,7 +261,7 @@
         <p:txBody>
           <a:bodyPr/>
           <a:p>
-            <a:fld id="{2232A6D5-8448-410E-8E8D-A6AA7705DDA1}" type="slidenum">
+            <a:fld id="{2A44FC4F-BDE2-4F1A-95ED-CCD0563E28E0}" type="slidenum">
               <a:t>&lt;#&gt;</a:t>
             </a:fld>
           </a:p>
@@ -520,7 +517,7 @@
         <p:txBody>
           <a:bodyPr/>
           <a:p>
-            <a:fld id="{DE19239C-8B25-4109-9AEE-232945270A6C}" type="slidenum">
+            <a:fld id="{279DAD2D-1826-4E5A-9774-209B5DE92A25}" type="slidenum">
               <a:t>&lt;#&gt;</a:t>
             </a:fld>
           </a:p>
@@ -844,7 +841,7 @@
         <p:txBody>
           <a:bodyPr/>
           <a:p>
-            <a:fld id="{A74C6492-2E8A-4964-B4AC-CA308FD14504}" type="slidenum">
+            <a:fld id="{7FA73D81-B7ED-49D5-B4BF-0F9564B5BB3D}" type="slidenum">
               <a:t>&lt;#&gt;</a:t>
             </a:fld>
           </a:p>
@@ -927,7 +924,7 @@
         <p:txBody>
           <a:bodyPr/>
           <a:p>
-            <a:fld id="{3E33302F-CE67-49A8-ACFA-12723C7FD714}" type="slidenum">
+            <a:fld id="{EB46E58E-1360-4A1D-9A20-AF7D73EC61FD}" type="slidenum">
               <a:t>&lt;#&gt;</a:t>
             </a:fld>
           </a:p>
@@ -1084,7 +1081,7 @@
         <p:txBody>
           <a:bodyPr/>
           <a:p>
-            <a:fld id="{C7F04BA7-538C-4722-9EDD-C69FF0513FA7}" type="slidenum">
+            <a:fld id="{602C3731-A474-47C8-B587-340DEFA0C536}" type="slidenum">
               <a:t>&lt;#&gt;</a:t>
             </a:fld>
           </a:p>
@@ -1238,7 +1235,7 @@
         <p:txBody>
           <a:bodyPr/>
           <a:p>
-            <a:fld id="{808F7BFD-94A6-4AB2-97D4-207F657D1D6A}" type="slidenum">
+            <a:fld id="{E65E3213-846A-40A9-8A7C-6E6E6AF259AD}" type="slidenum">
               <a:t>&lt;#&gt;</a:t>
             </a:fld>
           </a:p>
@@ -1426,7 +1423,7 @@
         <p:txBody>
           <a:bodyPr/>
           <a:p>
-            <a:fld id="{368E6EC7-7CED-4943-A16E-A1B8DE3FD9F0}" type="slidenum">
+            <a:fld id="{E317CCAC-4920-44A2-B644-971FA3ADE5CE}" type="slidenum">
               <a:t>&lt;#&gt;</a:t>
             </a:fld>
           </a:p>
@@ -1546,7 +1543,7 @@
         <p:txBody>
           <a:bodyPr/>
           <a:p>
-            <a:fld id="{D04E3463-1FFB-4FD5-9D81-9AF1E7160328}" type="slidenum">
+            <a:fld id="{D54DBDFF-0EDE-4CCC-9827-836F7BB15185}" type="slidenum">
               <a:t>&lt;#&gt;</a:t>
             </a:fld>
           </a:p>
@@ -1666,7 +1663,7 @@
         <p:txBody>
           <a:bodyPr/>
           <a:p>
-            <a:fld id="{6434C620-8DD2-4612-8594-A40CB17D9D81}" type="slidenum">
+            <a:fld id="{CDF9877E-3EA6-4EA0-932A-D28F7EBC6DB4}" type="slidenum">
               <a:t>&lt;#&gt;</a:t>
             </a:fld>
           </a:p>
@@ -1888,7 +1885,7 @@
         <p:txBody>
           <a:bodyPr/>
           <a:p>
-            <a:fld id="{6A672D82-6CD6-41EB-8302-7CC8C52D7713}" type="slidenum">
+            <a:fld id="{ECD3BFF0-6F2E-4838-88D8-C502E47F692A}" type="slidenum">
               <a:t>&lt;#&gt;</a:t>
             </a:fld>
           </a:p>
@@ -2045,7 +2042,7 @@
         <p:txBody>
           <a:bodyPr/>
           <a:p>
-            <a:fld id="{A3B0B1EB-69BB-453F-BAF2-B3F9CA767271}" type="slidenum">
+            <a:fld id="{46FFDDC6-F1FF-4E1B-A2FE-EC3FFFC16A2E}" type="slidenum">
               <a:t>&lt;#&gt;</a:t>
             </a:fld>
           </a:p>
@@ -2267,7 +2264,7 @@
         <p:txBody>
           <a:bodyPr/>
           <a:p>
-            <a:fld id="{3716D698-6673-404F-916E-4F13F6B357B5}" type="slidenum">
+            <a:fld id="{C01E24A6-5D3B-4FF4-BCA3-30858D0F7E00}" type="slidenum">
               <a:t>&lt;#&gt;</a:t>
             </a:fld>
           </a:p>
@@ -2489,7 +2486,7 @@
         <p:txBody>
           <a:bodyPr/>
           <a:p>
-            <a:fld id="{92F87838-812A-43E4-B978-4E8BC1294F7B}" type="slidenum">
+            <a:fld id="{46358B2D-589E-437E-9F0A-25453C05AF35}" type="slidenum">
               <a:t>&lt;#&gt;</a:t>
             </a:fld>
           </a:p>
@@ -2677,7 +2674,7 @@
         <p:txBody>
           <a:bodyPr/>
           <a:p>
-            <a:fld id="{5D320554-DC88-456B-951B-A2F7CAF36A01}" type="slidenum">
+            <a:fld id="{9DCA9EF4-24A5-499A-A160-DD8EF0233432}" type="slidenum">
               <a:t>&lt;#&gt;</a:t>
             </a:fld>
           </a:p>
@@ -2933,7 +2930,7 @@
         <p:txBody>
           <a:bodyPr/>
           <a:p>
-            <a:fld id="{6FA07C13-9BC6-4C01-B9A7-243C8747A90B}" type="slidenum">
+            <a:fld id="{F29502E8-0241-4F0C-994D-D96D81851A70}" type="slidenum">
               <a:t>&lt;#&gt;</a:t>
             </a:fld>
           </a:p>
@@ -3257,7 +3254,7 @@
         <p:txBody>
           <a:bodyPr/>
           <a:p>
-            <a:fld id="{F50E9787-84C5-4072-9237-A749266DD65E}" type="slidenum">
+            <a:fld id="{5A074FAD-3143-4365-A0BB-BA7432D9039B}" type="slidenum">
               <a:t>&lt;#&gt;</a:t>
             </a:fld>
           </a:p>
@@ -3340,7 +3337,7 @@
         <p:txBody>
           <a:bodyPr/>
           <a:p>
-            <a:fld id="{E07366FF-4AE7-461A-A698-B51093C89EB4}" type="slidenum">
+            <a:fld id="{00F5C1FA-E78E-4909-9DA0-E076989A1A3D}" type="slidenum">
               <a:t>&lt;#&gt;</a:t>
             </a:fld>
           </a:p>
@@ -3497,7 +3494,7 @@
         <p:txBody>
           <a:bodyPr/>
           <a:p>
-            <a:fld id="{18B762EB-E0ED-40F5-8FE2-BF043333779A}" type="slidenum">
+            <a:fld id="{D4B67DB6-2AA3-4748-8BCE-D78EB09B45FF}" type="slidenum">
               <a:t>&lt;#&gt;</a:t>
             </a:fld>
           </a:p>
@@ -3651,7 +3648,7 @@
         <p:txBody>
           <a:bodyPr/>
           <a:p>
-            <a:fld id="{39F8772B-7497-46C7-BDDF-BED422FEF189}" type="slidenum">
+            <a:fld id="{3DF26190-62D8-4F5E-8966-80DF738A36AE}" type="slidenum">
               <a:t>&lt;#&gt;</a:t>
             </a:fld>
           </a:p>
@@ -3839,7 +3836,7 @@
         <p:txBody>
           <a:bodyPr/>
           <a:p>
-            <a:fld id="{F09C3AAE-DABF-490C-B68D-82084301D1AA}" type="slidenum">
+            <a:fld id="{53335A2B-6C41-4CF0-B4CD-2F14F78EB94B}" type="slidenum">
               <a:t>&lt;#&gt;</a:t>
             </a:fld>
           </a:p>
@@ -3959,7 +3956,7 @@
         <p:txBody>
           <a:bodyPr/>
           <a:p>
-            <a:fld id="{EDC91D09-8D60-4F7F-884F-373B16BB5299}" type="slidenum">
+            <a:fld id="{EBAF756A-A907-4444-83DF-88875BF0BAE8}" type="slidenum">
               <a:t>&lt;#&gt;</a:t>
             </a:fld>
           </a:p>
@@ -4113,7 +4110,7 @@
         <p:txBody>
           <a:bodyPr/>
           <a:p>
-            <a:fld id="{C51D6226-8A13-45FF-9E7B-68FD42B82785}" type="slidenum">
+            <a:fld id="{200A4911-4AE5-48B4-96ED-82DFF88B3699}" type="slidenum">
               <a:t>&lt;#&gt;</a:t>
             </a:fld>
           </a:p>
@@ -4233,7 +4230,7 @@
         <p:txBody>
           <a:bodyPr/>
           <a:p>
-            <a:fld id="{4D23E9BA-EC73-4C54-8D16-34478A3F5063}" type="slidenum">
+            <a:fld id="{042F5383-49F5-4082-9888-5BF8A533CB21}" type="slidenum">
               <a:t>&lt;#&gt;</a:t>
             </a:fld>
           </a:p>
@@ -4455,7 +4452,7 @@
         <p:txBody>
           <a:bodyPr/>
           <a:p>
-            <a:fld id="{BC18861A-BFBC-4BDC-BE9C-7E192BC6E38E}" type="slidenum">
+            <a:fld id="{2533DC3C-39A3-459D-922F-7B353154EFF0}" type="slidenum">
               <a:t>&lt;#&gt;</a:t>
             </a:fld>
           </a:p>
@@ -4677,7 +4674,7 @@
         <p:txBody>
           <a:bodyPr/>
           <a:p>
-            <a:fld id="{00101191-5187-46CD-8A05-11C4B206EBCC}" type="slidenum">
+            <a:fld id="{2A5D7043-BA0A-436D-B8A9-27C7ACF4B244}" type="slidenum">
               <a:t>&lt;#&gt;</a:t>
             </a:fld>
           </a:p>
@@ -4899,7 +4896,7 @@
         <p:txBody>
           <a:bodyPr/>
           <a:p>
-            <a:fld id="{3DFA7311-FECC-495B-97D7-B6C5A63E63E2}" type="slidenum">
+            <a:fld id="{DF3C246F-DDD7-49B5-8034-E42028F58ECE}" type="slidenum">
               <a:t>&lt;#&gt;</a:t>
             </a:fld>
           </a:p>
@@ -5087,7 +5084,7 @@
         <p:txBody>
           <a:bodyPr/>
           <a:p>
-            <a:fld id="{171572B3-160F-4223-8ED5-4F1922C5037F}" type="slidenum">
+            <a:fld id="{3892C372-9898-406B-9E2E-49D5A117038F}" type="slidenum">
               <a:t>&lt;#&gt;</a:t>
             </a:fld>
           </a:p>
@@ -5343,7 +5340,7 @@
         <p:txBody>
           <a:bodyPr/>
           <a:p>
-            <a:fld id="{2243D8DB-61F0-466C-B6F5-9E85CB065C77}" type="slidenum">
+            <a:fld id="{D1C9D4D6-B90C-46A4-9EED-02C001C5069D}" type="slidenum">
               <a:t>&lt;#&gt;</a:t>
             </a:fld>
           </a:p>
@@ -5667,7 +5664,7 @@
         <p:txBody>
           <a:bodyPr/>
           <a:p>
-            <a:fld id="{57F059A0-236C-4AB0-919F-2A6081060B31}" type="slidenum">
+            <a:fld id="{A6A5EDE5-12B7-40F7-81ED-BF1514905612}" type="slidenum">
               <a:t>&lt;#&gt;</a:t>
             </a:fld>
           </a:p>
@@ -5855,7 +5852,7 @@
         <p:txBody>
           <a:bodyPr/>
           <a:p>
-            <a:fld id="{D36B9BB1-3F89-47A6-8AB8-CBA646300047}" type="slidenum">
+            <a:fld id="{47DE757D-927C-4FDA-973B-C1F3954E1342}" type="slidenum">
               <a:t>&lt;#&gt;</a:t>
             </a:fld>
           </a:p>
@@ -5975,7 +5972,7 @@
         <p:txBody>
           <a:bodyPr/>
           <a:p>
-            <a:fld id="{34A0544C-1A79-4098-A487-4048F78C5C1F}" type="slidenum">
+            <a:fld id="{9DFF66CA-5773-4D96-87DE-17FB47201C4E}" type="slidenum">
               <a:t>&lt;#&gt;</a:t>
             </a:fld>
           </a:p>
@@ -6095,7 +6092,7 @@
         <p:txBody>
           <a:bodyPr/>
           <a:p>
-            <a:fld id="{28E158E6-CBBB-481D-82F8-AB3F0E4800F7}" type="slidenum">
+            <a:fld id="{03B4830A-186C-483A-A502-AE08271AD9C8}" type="slidenum">
               <a:t>&lt;#&gt;</a:t>
             </a:fld>
           </a:p>
@@ -6317,7 +6314,7 @@
         <p:txBody>
           <a:bodyPr/>
           <a:p>
-            <a:fld id="{F76246B2-BA9C-49A0-A69E-BF327BA962B6}" type="slidenum">
+            <a:fld id="{318E1685-7F83-4D32-B49E-C7B145E157F5}" type="slidenum">
               <a:t>&lt;#&gt;</a:t>
             </a:fld>
           </a:p>
@@ -6539,7 +6536,7 @@
         <p:txBody>
           <a:bodyPr/>
           <a:p>
-            <a:fld id="{4FB4D3CA-FBF3-4C88-B019-1000C32316AF}" type="slidenum">
+            <a:fld id="{CE478E1C-BEA4-443F-A5E4-5BF7842A75E8}" type="slidenum">
               <a:t>&lt;#&gt;</a:t>
             </a:fld>
           </a:p>
@@ -6761,7 +6758,7 @@
         <p:txBody>
           <a:bodyPr/>
           <a:p>
-            <a:fld id="{6AA4D97D-C86D-4685-8C87-29EA80FB96A0}" type="slidenum">
+            <a:fld id="{7E2E8ADE-CE4C-4321-99F5-53BAAA69F4C8}" type="slidenum">
               <a:t>&lt;#&gt;</a:t>
             </a:fld>
           </a:p>
@@ -6864,13 +6861,196 @@
             <a:spLocks noGrp="1"/>
           </p:cNvSpPr>
           <p:nvPr>
+            <p:ph type="body"/>
+          </p:nvPr>
+        </p:nvSpPr>
+        <p:spPr>
+          <a:xfrm>
+            <a:off x="609120" y="1604520"/>
+            <a:ext cx="10969200" cy="3976920"/>
+          </a:xfrm>
+          <a:prstGeom prst="rect">
+            <a:avLst/>
+          </a:prstGeom>
+          <a:noFill/>
+          <a:ln w="0">
+            <a:noFill/>
+          </a:ln>
+        </p:spPr>
+        <p:txBody>
+          <a:bodyPr lIns="0" rIns="0" tIns="0" bIns="0" anchor="t">
+            <a:normAutofit/>
+          </a:bodyPr>
+          <a:p>
+            <a:pPr marL="432000" indent="-324000">
+              <a:spcBef>
+                <a:spcPts val="1417"/>
+              </a:spcBef>
+              <a:buClr>
+                <a:srgbClr val="000000"/>
+              </a:buClr>
+              <a:buSzPct val="45000"/>
+              <a:buFont typeface="Wingdings" charset="2"/>
+              <a:buChar char=""/>
+            </a:pPr>
+            <a:r>
+              <a:rPr b="0" lang="en-US" sz="1800" spc="-1" strike="noStrike">
+                <a:latin typeface="Arial"/>
+              </a:rPr>
+              <a:t>Click to edit the outline text format</a:t>
+            </a:r>
+            <a:endParaRPr b="0" lang="en-US" sz="1800" spc="-1" strike="noStrike">
+              <a:latin typeface="Arial"/>
+            </a:endParaRPr>
+          </a:p>
+          <a:p>
+            <a:pPr lvl="1" marL="864000" indent="-324000">
+              <a:spcBef>
+                <a:spcPts val="1134"/>
+              </a:spcBef>
+              <a:buClr>
+                <a:srgbClr val="000000"/>
+              </a:buClr>
+              <a:buSzPct val="75000"/>
+              <a:buFont typeface="Symbol" charset="2"/>
+              <a:buChar char=""/>
+            </a:pPr>
+            <a:r>
+              <a:rPr b="0" lang="en-US" sz="1800" spc="-1" strike="noStrike">
+                <a:latin typeface="Arial"/>
+              </a:rPr>
+              <a:t>Second Outline Level</a:t>
+            </a:r>
+            <a:endParaRPr b="0" lang="en-US" sz="1800" spc="-1" strike="noStrike">
+              <a:latin typeface="Arial"/>
+            </a:endParaRPr>
+          </a:p>
+          <a:p>
+            <a:pPr lvl="2" marL="1296000" indent="-288000">
+              <a:spcBef>
+                <a:spcPts val="850"/>
+              </a:spcBef>
+              <a:buClr>
+                <a:srgbClr val="000000"/>
+              </a:buClr>
+              <a:buSzPct val="45000"/>
+              <a:buFont typeface="Wingdings" charset="2"/>
+              <a:buChar char=""/>
+            </a:pPr>
+            <a:r>
+              <a:rPr b="0" lang="en-US" sz="1800" spc="-1" strike="noStrike">
+                <a:latin typeface="Arial"/>
+              </a:rPr>
+              <a:t>Third Outline Level</a:t>
+            </a:r>
+            <a:endParaRPr b="0" lang="en-US" sz="1800" spc="-1" strike="noStrike">
+              <a:latin typeface="Arial"/>
+            </a:endParaRPr>
+          </a:p>
+          <a:p>
+            <a:pPr lvl="3" marL="1728000" indent="-216000">
+              <a:spcBef>
+                <a:spcPts val="567"/>
+              </a:spcBef>
+              <a:buClr>
+                <a:srgbClr val="000000"/>
+              </a:buClr>
+              <a:buSzPct val="75000"/>
+              <a:buFont typeface="Symbol" charset="2"/>
+              <a:buChar char=""/>
+            </a:pPr>
+            <a:r>
+              <a:rPr b="0" lang="en-US" sz="1800" spc="-1" strike="noStrike">
+                <a:latin typeface="Arial"/>
+              </a:rPr>
+              <a:t>Fourth Outline Level</a:t>
+            </a:r>
+            <a:endParaRPr b="0" lang="en-US" sz="1800" spc="-1" strike="noStrike">
+              <a:latin typeface="Arial"/>
+            </a:endParaRPr>
+          </a:p>
+          <a:p>
+            <a:pPr lvl="4" marL="2160000" indent="-216000">
+              <a:spcBef>
+                <a:spcPts val="283"/>
+              </a:spcBef>
+              <a:buClr>
+                <a:srgbClr val="000000"/>
+              </a:buClr>
+              <a:buSzPct val="45000"/>
+              <a:buFont typeface="Wingdings" charset="2"/>
+              <a:buChar char=""/>
+            </a:pPr>
+            <a:r>
+              <a:rPr b="0" lang="en-US" sz="1800" spc="-1" strike="noStrike">
+                <a:latin typeface="Arial"/>
+              </a:rPr>
+              <a:t>Fifth Outline Level</a:t>
+            </a:r>
+            <a:endParaRPr b="0" lang="en-US" sz="1800" spc="-1" strike="noStrike">
+              <a:latin typeface="Arial"/>
+            </a:endParaRPr>
+          </a:p>
+          <a:p>
+            <a:pPr lvl="5" marL="2592000" indent="-216000">
+              <a:spcBef>
+                <a:spcPts val="283"/>
+              </a:spcBef>
+              <a:buClr>
+                <a:srgbClr val="000000"/>
+              </a:buClr>
+              <a:buSzPct val="45000"/>
+              <a:buFont typeface="Wingdings" charset="2"/>
+              <a:buChar char=""/>
+            </a:pPr>
+            <a:r>
+              <a:rPr b="0" lang="en-US" sz="1800" spc="-1" strike="noStrike">
+                <a:latin typeface="Arial"/>
+              </a:rPr>
+              <a:t>Sixth Outline Level</a:t>
+            </a:r>
+            <a:endParaRPr b="0" lang="en-US" sz="1800" spc="-1" strike="noStrike">
+              <a:latin typeface="Arial"/>
+            </a:endParaRPr>
+          </a:p>
+          <a:p>
+            <a:pPr lvl="6" marL="3024000" indent="-216000">
+              <a:spcBef>
+                <a:spcPts val="283"/>
+              </a:spcBef>
+              <a:buClr>
+                <a:srgbClr val="000000"/>
+              </a:buClr>
+              <a:buSzPct val="45000"/>
+              <a:buFont typeface="Wingdings" charset="2"/>
+              <a:buChar char=""/>
+            </a:pPr>
+            <a:r>
+              <a:rPr b="0" lang="en-US" sz="1800" spc="-1" strike="noStrike">
+                <a:latin typeface="Arial"/>
+              </a:rPr>
+              <a:t>Seventh Outline Level</a:t>
+            </a:r>
+            <a:endParaRPr b="0" lang="en-US" sz="1800" spc="-1" strike="noStrike">
+              <a:latin typeface="Arial"/>
+            </a:endParaRPr>
+          </a:p>
+        </p:txBody>
+      </p:sp>
+      <p:sp>
+        <p:nvSpPr>
+          <p:cNvPr id="2" name="PlaceHolder 3"/>
+          <p:cNvSpPr>
+            <a:spLocks noGrp="1"/>
+          </p:cNvSpPr>
+          <p:nvPr>
             <p:ph type="ftr" idx="1"/>
           </p:nvPr>
         </p:nvSpPr>
         <p:spPr>
           <a:xfrm>
             <a:off x="3124080" y="6356520"/>
-            <a:ext cx="2894760" cy="364320"/>
+            <a:ext cx="2894400" cy="363960"/>
           </a:xfrm>
           <a:prstGeom prst="rect">
             <a:avLst/>
@@ -6916,7 +7096,7 @@
       </p:sp>
       <p:sp>
         <p:nvSpPr>
-          <p:cNvPr id="2" name="PlaceHolder 3"/>
+          <p:cNvPr id="3" name="PlaceHolder 4"/>
           <p:cNvSpPr>
             <a:spLocks noGrp="1"/>
           </p:cNvSpPr>
@@ -6927,7 +7107,7 @@
         <p:spPr>
           <a:xfrm>
             <a:off x="6553080" y="6356520"/>
-            <a:ext cx="2133000" cy="364320"/>
+            <a:ext cx="2132640" cy="363960"/>
           </a:xfrm>
           <a:prstGeom prst="rect">
             <a:avLst/>
@@ -6962,7 +7142,7 @@
               </a:lnSpc>
               <a:buNone/>
             </a:pPr>
-            <a:fld id="{30923984-3AA9-4442-AB7D-ACBCEFF3032D}" type="slidenum">
+            <a:fld id="{C5E3FDF0-2EF4-410A-AADC-EF707A9AABFF}" type="slidenum">
               <a:rPr b="0" lang="en-US" sz="1200" spc="-1" strike="noStrike">
                 <a:solidFill>
                   <a:srgbClr val="8b8b8b"/>
@@ -6979,7 +7159,7 @@
       </p:sp>
       <p:sp>
         <p:nvSpPr>
-          <p:cNvPr id="3" name="PlaceHolder 4"/>
+          <p:cNvPr id="4" name="PlaceHolder 5"/>
           <p:cNvSpPr>
             <a:spLocks noGrp="1"/>
           </p:cNvSpPr>
@@ -6990,7 +7170,7 @@
         <p:spPr>
           <a:xfrm>
             <a:off x="457200" y="6356520"/>
-            <a:ext cx="2133000" cy="364320"/>
+            <a:ext cx="2132640" cy="363960"/>
           </a:xfrm>
           <a:prstGeom prst="rect">
             <a:avLst/>
@@ -7020,189 +7200,6 @@
             </a:r>
             <a:endParaRPr b="0" lang="en-US" sz="1400" spc="-1" strike="noStrike">
               <a:latin typeface="Times New Roman"/>
-            </a:endParaRPr>
-          </a:p>
-        </p:txBody>
-      </p:sp>
-      <p:sp>
-        <p:nvSpPr>
-          <p:cNvPr id="4" name="PlaceHolder 5"/>
-          <p:cNvSpPr>
-            <a:spLocks noGrp="1"/>
-          </p:cNvSpPr>
-          <p:nvPr>
-            <p:ph type="body"/>
-          </p:nvPr>
-        </p:nvSpPr>
-        <p:spPr>
-          <a:xfrm>
-            <a:off x="609120" y="1604520"/>
-            <a:ext cx="10969560" cy="3977280"/>
-          </a:xfrm>
-          <a:prstGeom prst="rect">
-            <a:avLst/>
-          </a:prstGeom>
-          <a:noFill/>
-          <a:ln w="0">
-            <a:noFill/>
-          </a:ln>
-        </p:spPr>
-        <p:txBody>
-          <a:bodyPr lIns="0" rIns="0" tIns="0" bIns="0" anchor="t">
-            <a:normAutofit/>
-          </a:bodyPr>
-          <a:p>
-            <a:pPr marL="432000" indent="-324000">
-              <a:spcBef>
-                <a:spcPts val="1417"/>
-              </a:spcBef>
-              <a:buClr>
-                <a:srgbClr val="000000"/>
-              </a:buClr>
-              <a:buSzPct val="45000"/>
-              <a:buFont typeface="Wingdings" charset="2"/>
-              <a:buChar char=""/>
-            </a:pPr>
-            <a:r>
-              <a:rPr b="0" lang="en-US" sz="3200" spc="-1" strike="noStrike">
-                <a:latin typeface="Arial"/>
-              </a:rPr>
-              <a:t>Click to edit the outline text format</a:t>
-            </a:r>
-            <a:endParaRPr b="0" lang="en-US" sz="3200" spc="-1" strike="noStrike">
-              <a:latin typeface="Arial"/>
-            </a:endParaRPr>
-          </a:p>
-          <a:p>
-            <a:pPr lvl="1" marL="864000" indent="-324000">
-              <a:spcBef>
-                <a:spcPts val="1134"/>
-              </a:spcBef>
-              <a:buClr>
-                <a:srgbClr val="000000"/>
-              </a:buClr>
-              <a:buSzPct val="75000"/>
-              <a:buFont typeface="Symbol" charset="2"/>
-              <a:buChar char=""/>
-            </a:pPr>
-            <a:r>
-              <a:rPr b="0" lang="en-US" sz="2800" spc="-1" strike="noStrike">
-                <a:latin typeface="Arial"/>
-              </a:rPr>
-              <a:t>Second Outline Level</a:t>
-            </a:r>
-            <a:endParaRPr b="0" lang="en-US" sz="2800" spc="-1" strike="noStrike">
-              <a:latin typeface="Arial"/>
-            </a:endParaRPr>
-          </a:p>
-          <a:p>
-            <a:pPr lvl="2" marL="1296000" indent="-288000">
-              <a:spcBef>
-                <a:spcPts val="850"/>
-              </a:spcBef>
-              <a:buClr>
-                <a:srgbClr val="000000"/>
-              </a:buClr>
-              <a:buSzPct val="45000"/>
-              <a:buFont typeface="Wingdings" charset="2"/>
-              <a:buChar char=""/>
-            </a:pPr>
-            <a:r>
-              <a:rPr b="0" lang="en-US" sz="2400" spc="-1" strike="noStrike">
-                <a:latin typeface="Arial"/>
-              </a:rPr>
-              <a:t>Third Outline Level</a:t>
-            </a:r>
-            <a:endParaRPr b="0" lang="en-US" sz="2400" spc="-1" strike="noStrike">
-              <a:latin typeface="Arial"/>
-            </a:endParaRPr>
-          </a:p>
-          <a:p>
-            <a:pPr lvl="3" marL="1728000" indent="-216000">
-              <a:spcBef>
-                <a:spcPts val="567"/>
-              </a:spcBef>
-              <a:buClr>
-                <a:srgbClr val="000000"/>
-              </a:buClr>
-              <a:buSzPct val="75000"/>
-              <a:buFont typeface="Symbol" charset="2"/>
-              <a:buChar char=""/>
-            </a:pPr>
-            <a:r>
-              <a:rPr b="0" lang="en-US" sz="2000" spc="-1" strike="noStrike">
-                <a:latin typeface="Arial"/>
-              </a:rPr>
-              <a:t>Fourth Outline Level</a:t>
-            </a:r>
-            <a:endParaRPr b="0" lang="en-US" sz="2000" spc="-1" strike="noStrike">
-              <a:latin typeface="Arial"/>
-            </a:endParaRPr>
-          </a:p>
-          <a:p>
-            <a:pPr lvl="4" marL="2160000" indent="-216000">
-              <a:spcBef>
-                <a:spcPts val="283"/>
-              </a:spcBef>
-              <a:buClr>
-                <a:srgbClr val="000000"/>
-              </a:buClr>
-              <a:buSzPct val="45000"/>
-              <a:buFont typeface="Wingdings" charset="2"/>
-              <a:buChar char=""/>
-            </a:pPr>
-            <a:r>
-              <a:rPr b="0" lang="en-US" sz="2000" spc="-1" strike="noStrike">
-                <a:latin typeface="Arial"/>
-              </a:rPr>
-              <a:t>Fifth Outline Level</a:t>
-            </a:r>
-            <a:endParaRPr b="0" lang="en-US" sz="2000" spc="-1" strike="noStrike">
-              <a:latin typeface="Arial"/>
-            </a:endParaRPr>
-          </a:p>
-          <a:p>
-            <a:pPr lvl="5" marL="2592000" indent="-216000">
-              <a:spcBef>
-                <a:spcPts val="283"/>
-              </a:spcBef>
-              <a:buClr>
-                <a:srgbClr val="000000"/>
-              </a:buClr>
-              <a:buSzPct val="45000"/>
-              <a:buFont typeface="Wingdings" charset="2"/>
-              <a:buChar char=""/>
-            </a:pPr>
-            <a:r>
-              <a:rPr b="0" lang="en-US" sz="2000" spc="-1" strike="noStrike">
-                <a:latin typeface="Arial"/>
-              </a:rPr>
-              <a:t>Sixth Outline Level</a:t>
-            </a:r>
-            <a:endParaRPr b="0" lang="en-US" sz="2000" spc="-1" strike="noStrike">
-              <a:latin typeface="Arial"/>
-            </a:endParaRPr>
-          </a:p>
-          <a:p>
-            <a:pPr lvl="6" marL="3024000" indent="-216000">
-              <a:spcBef>
-                <a:spcPts val="283"/>
-              </a:spcBef>
-              <a:buClr>
-                <a:srgbClr val="000000"/>
-              </a:buClr>
-              <a:buSzPct val="45000"/>
-              <a:buFont typeface="Wingdings" charset="2"/>
-              <a:buChar char=""/>
-            </a:pPr>
-            <a:r>
-              <a:rPr b="0" lang="en-US" sz="2000" spc="-1" strike="noStrike">
-                <a:latin typeface="Arial"/>
-              </a:rPr>
-              <a:t>Seventh Outline Level</a:t>
-            </a:r>
-            <a:endParaRPr b="0" lang="en-US" sz="2000" spc="-1" strike="noStrike">
-              <a:latin typeface="Arial"/>
             </a:endParaRPr>
           </a:p>
         </p:txBody>
@@ -7258,236 +7255,13 @@
             <a:spLocks noGrp="1"/>
           </p:cNvSpPr>
           <p:nvPr>
-            <p:ph type="title"/>
-          </p:nvPr>
-        </p:nvSpPr>
-        <p:spPr>
-          <a:xfrm>
-            <a:off x="609120" y="273600"/>
-            <a:ext cx="10969200" cy="1144440"/>
-          </a:xfrm>
-          <a:prstGeom prst="rect">
-            <a:avLst/>
-          </a:prstGeom>
-          <a:noFill/>
-          <a:ln w="0">
-            <a:noFill/>
-          </a:ln>
-        </p:spPr>
-        <p:txBody>
-          <a:bodyPr lIns="0" rIns="0" tIns="0" bIns="0" anchor="ctr">
-            <a:noAutofit/>
-          </a:bodyPr>
-          <a:p>
-            <a:r>
-              <a:rPr b="0" lang="en-US" sz="1800" spc="-1" strike="noStrike">
-                <a:latin typeface="Arial"/>
-              </a:rPr>
-              <a:t>Click to edit the title text format</a:t>
-            </a:r>
-            <a:endParaRPr b="0" lang="en-US" sz="1800" spc="-1" strike="noStrike">
-              <a:latin typeface="Arial"/>
-            </a:endParaRPr>
-          </a:p>
-        </p:txBody>
-      </p:sp>
-      <p:sp>
-        <p:nvSpPr>
-          <p:cNvPr id="42" name="PlaceHolder 2"/>
-          <p:cNvSpPr>
-            <a:spLocks noGrp="1"/>
-          </p:cNvSpPr>
-          <p:nvPr>
-            <p:ph type="body"/>
-          </p:nvPr>
-        </p:nvSpPr>
-        <p:spPr>
-          <a:xfrm>
-            <a:off x="609120" y="1604520"/>
-            <a:ext cx="10969200" cy="3976920"/>
-          </a:xfrm>
-          <a:prstGeom prst="rect">
-            <a:avLst/>
-          </a:prstGeom>
-          <a:noFill/>
-          <a:ln w="0">
-            <a:noFill/>
-          </a:ln>
-        </p:spPr>
-        <p:txBody>
-          <a:bodyPr lIns="0" rIns="0" tIns="0" bIns="0" anchor="t">
-            <a:normAutofit/>
-          </a:bodyPr>
-          <a:p>
-            <a:pPr marL="432000" indent="-324000">
-              <a:spcBef>
-                <a:spcPts val="1417"/>
-              </a:spcBef>
-              <a:buClr>
-                <a:srgbClr val="000000"/>
-              </a:buClr>
-              <a:buSzPct val="45000"/>
-              <a:buFont typeface="Wingdings" charset="2"/>
-              <a:buChar char=""/>
-            </a:pPr>
-            <a:r>
-              <a:rPr b="0" lang="en-US" sz="1800" spc="-1" strike="noStrike">
-                <a:latin typeface="Arial"/>
-              </a:rPr>
-              <a:t>Click to edit the outline text format</a:t>
-            </a:r>
-            <a:endParaRPr b="0" lang="en-US" sz="1800" spc="-1" strike="noStrike">
-              <a:latin typeface="Arial"/>
-            </a:endParaRPr>
-          </a:p>
-          <a:p>
-            <a:pPr lvl="1" marL="864000" indent="-324000">
-              <a:spcBef>
-                <a:spcPts val="1134"/>
-              </a:spcBef>
-              <a:buClr>
-                <a:srgbClr val="000000"/>
-              </a:buClr>
-              <a:buSzPct val="75000"/>
-              <a:buFont typeface="Symbol" charset="2"/>
-              <a:buChar char=""/>
-            </a:pPr>
-            <a:r>
-              <a:rPr b="0" lang="en-US" sz="1800" spc="-1" strike="noStrike">
-                <a:latin typeface="Arial"/>
-              </a:rPr>
-              <a:t>Second Outline Level</a:t>
-            </a:r>
-            <a:endParaRPr b="0" lang="en-US" sz="1800" spc="-1" strike="noStrike">
-              <a:latin typeface="Arial"/>
-            </a:endParaRPr>
-          </a:p>
-          <a:p>
-            <a:pPr lvl="2" marL="1296000" indent="-288000">
-              <a:spcBef>
-                <a:spcPts val="850"/>
-              </a:spcBef>
-              <a:buClr>
-                <a:srgbClr val="000000"/>
-              </a:buClr>
-              <a:buSzPct val="45000"/>
-              <a:buFont typeface="Wingdings" charset="2"/>
-              <a:buChar char=""/>
-            </a:pPr>
-            <a:r>
-              <a:rPr b="0" lang="en-US" sz="1800" spc="-1" strike="noStrike">
-                <a:latin typeface="Arial"/>
-              </a:rPr>
-              <a:t>Third Outline Level</a:t>
-            </a:r>
-            <a:endParaRPr b="0" lang="en-US" sz="1800" spc="-1" strike="noStrike">
-              <a:latin typeface="Arial"/>
-            </a:endParaRPr>
-          </a:p>
-          <a:p>
-            <a:pPr lvl="3" marL="1728000" indent="-216000">
-              <a:spcBef>
-                <a:spcPts val="567"/>
-              </a:spcBef>
-              <a:buClr>
-                <a:srgbClr val="000000"/>
-              </a:buClr>
-              <a:buSzPct val="75000"/>
-              <a:buFont typeface="Symbol" charset="2"/>
-              <a:buChar char=""/>
-            </a:pPr>
-            <a:r>
-              <a:rPr b="0" lang="en-US" sz="1800" spc="-1" strike="noStrike">
-                <a:latin typeface="Arial"/>
-              </a:rPr>
-              <a:t>Fourth Outline Level</a:t>
-            </a:r>
-            <a:endParaRPr b="0" lang="en-US" sz="1800" spc="-1" strike="noStrike">
-              <a:latin typeface="Arial"/>
-            </a:endParaRPr>
-          </a:p>
-          <a:p>
-            <a:pPr lvl="4" marL="2160000" indent="-216000">
-              <a:spcBef>
-                <a:spcPts val="283"/>
-              </a:spcBef>
-              <a:buClr>
-                <a:srgbClr val="000000"/>
-              </a:buClr>
-              <a:buSzPct val="45000"/>
-              <a:buFont typeface="Wingdings" charset="2"/>
-              <a:buChar char=""/>
-            </a:pPr>
-            <a:r>
-              <a:rPr b="0" lang="en-US" sz="1800" spc="-1" strike="noStrike">
-                <a:latin typeface="Arial"/>
-              </a:rPr>
-              <a:t>Fifth Outline Level</a:t>
-            </a:r>
-            <a:endParaRPr b="0" lang="en-US" sz="1800" spc="-1" strike="noStrike">
-              <a:latin typeface="Arial"/>
-            </a:endParaRPr>
-          </a:p>
-          <a:p>
-            <a:pPr lvl="5" marL="2592000" indent="-216000">
-              <a:spcBef>
-                <a:spcPts val="283"/>
-              </a:spcBef>
-              <a:buClr>
-                <a:srgbClr val="000000"/>
-              </a:buClr>
-              <a:buSzPct val="45000"/>
-              <a:buFont typeface="Wingdings" charset="2"/>
-              <a:buChar char=""/>
-            </a:pPr>
-            <a:r>
-              <a:rPr b="0" lang="en-US" sz="1800" spc="-1" strike="noStrike">
-                <a:latin typeface="Arial"/>
-              </a:rPr>
-              <a:t>Sixth Outline Level</a:t>
-            </a:r>
-            <a:endParaRPr b="0" lang="en-US" sz="1800" spc="-1" strike="noStrike">
-              <a:latin typeface="Arial"/>
-            </a:endParaRPr>
-          </a:p>
-          <a:p>
-            <a:pPr lvl="6" marL="3024000" indent="-216000">
-              <a:spcBef>
-                <a:spcPts val="283"/>
-              </a:spcBef>
-              <a:buClr>
-                <a:srgbClr val="000000"/>
-              </a:buClr>
-              <a:buSzPct val="45000"/>
-              <a:buFont typeface="Wingdings" charset="2"/>
-              <a:buChar char=""/>
-            </a:pPr>
-            <a:r>
-              <a:rPr b="0" lang="en-US" sz="1800" spc="-1" strike="noStrike">
-                <a:latin typeface="Arial"/>
-              </a:rPr>
-              <a:t>Seventh Outline Level</a:t>
-            </a:r>
-            <a:endParaRPr b="0" lang="en-US" sz="1800" spc="-1" strike="noStrike">
-              <a:latin typeface="Arial"/>
-            </a:endParaRPr>
-          </a:p>
-        </p:txBody>
-      </p:sp>
-      <p:sp>
-        <p:nvSpPr>
-          <p:cNvPr id="43" name="PlaceHolder 3"/>
-          <p:cNvSpPr>
-            <a:spLocks noGrp="1"/>
-          </p:cNvSpPr>
-          <p:nvPr>
             <p:ph type="ftr" idx="4"/>
           </p:nvPr>
         </p:nvSpPr>
         <p:spPr>
           <a:xfrm>
             <a:off x="3124080" y="6356520"/>
-            <a:ext cx="2894760" cy="364320"/>
+            <a:ext cx="2894400" cy="363960"/>
           </a:xfrm>
           <a:prstGeom prst="rect">
             <a:avLst/>
@@ -7533,7 +7307,7 @@
       </p:sp>
       <p:sp>
         <p:nvSpPr>
-          <p:cNvPr id="44" name="PlaceHolder 4"/>
+          <p:cNvPr id="42" name="PlaceHolder 2"/>
           <p:cNvSpPr>
             <a:spLocks noGrp="1"/>
           </p:cNvSpPr>
@@ -7544,7 +7318,7 @@
         <p:spPr>
           <a:xfrm>
             <a:off x="6553080" y="6356520"/>
-            <a:ext cx="2133000" cy="364320"/>
+            <a:ext cx="2132640" cy="363960"/>
           </a:xfrm>
           <a:prstGeom prst="rect">
             <a:avLst/>
@@ -7579,7 +7353,7 @@
               </a:lnSpc>
               <a:buNone/>
             </a:pPr>
-            <a:fld id="{A8654DEB-9AB1-4036-A5CD-C326E7A02881}" type="slidenum">
+            <a:fld id="{8AF00F85-445F-400F-8099-24EDE74EB409}" type="slidenum">
               <a:rPr b="0" lang="en-US" sz="1200" spc="-1" strike="noStrike">
                 <a:solidFill>
                   <a:srgbClr val="8b8b8b"/>
@@ -7596,7 +7370,7 @@
       </p:sp>
       <p:sp>
         <p:nvSpPr>
-          <p:cNvPr id="45" name="PlaceHolder 5"/>
+          <p:cNvPr id="43" name="PlaceHolder 3"/>
           <p:cNvSpPr>
             <a:spLocks noGrp="1"/>
           </p:cNvSpPr>
@@ -7607,7 +7381,7 @@
         <p:spPr>
           <a:xfrm>
             <a:off x="457200" y="6356520"/>
-            <a:ext cx="2133000" cy="364320"/>
+            <a:ext cx="2132640" cy="363960"/>
           </a:xfrm>
           <a:prstGeom prst="rect">
             <a:avLst/>
@@ -7637,6 +7411,232 @@
             </a:r>
             <a:endParaRPr b="0" lang="en-US" sz="1400" spc="-1" strike="noStrike">
               <a:latin typeface="Times New Roman"/>
+            </a:endParaRPr>
+          </a:p>
+        </p:txBody>
+      </p:sp>
+      <p:sp>
+        <p:nvSpPr>
+          <p:cNvPr id="44" name="PlaceHolder 4"/>
+          <p:cNvSpPr>
+            <a:spLocks noGrp="1"/>
+          </p:cNvSpPr>
+          <p:nvPr>
+            <p:ph type="title"/>
+          </p:nvPr>
+        </p:nvSpPr>
+        <p:spPr>
+          <a:xfrm>
+            <a:off x="609120" y="273600"/>
+            <a:ext cx="10969560" cy="1144800"/>
+          </a:xfrm>
+          <a:prstGeom prst="rect">
+            <a:avLst/>
+          </a:prstGeom>
+          <a:noFill/>
+          <a:ln w="0">
+            <a:noFill/>
+          </a:ln>
+        </p:spPr>
+        <p:txBody>
+          <a:bodyPr lIns="0" rIns="0" tIns="0" bIns="0" anchor="ctr">
+            <a:noAutofit/>
+          </a:bodyPr>
+          <a:p>
+            <a:pPr algn="ctr">
+              <a:buNone/>
+            </a:pPr>
+            <a:r>
+              <a:rPr b="0" lang="en-US" sz="4400" spc="-1" strike="noStrike">
+                <a:latin typeface="Arial"/>
+              </a:rPr>
+              <a:t>Click to edit the title text format</a:t>
+            </a:r>
+            <a:endParaRPr b="0" lang="en-US" sz="4400" spc="-1" strike="noStrike">
+              <a:latin typeface="Arial"/>
+            </a:endParaRPr>
+          </a:p>
+        </p:txBody>
+      </p:sp>
+      <p:sp>
+        <p:nvSpPr>
+          <p:cNvPr id="45" name="PlaceHolder 5"/>
+          <p:cNvSpPr>
+            <a:spLocks noGrp="1"/>
+          </p:cNvSpPr>
+          <p:nvPr>
+            <p:ph type="body"/>
+          </p:nvPr>
+        </p:nvSpPr>
+        <p:spPr>
+          <a:xfrm>
+            <a:off x="609120" y="1604520"/>
+            <a:ext cx="10969560" cy="3977280"/>
+          </a:xfrm>
+          <a:prstGeom prst="rect">
+            <a:avLst/>
+          </a:prstGeom>
+          <a:noFill/>
+          <a:ln w="0">
+            <a:noFill/>
+          </a:ln>
+        </p:spPr>
+        <p:txBody>
+          <a:bodyPr lIns="0" rIns="0" tIns="0" bIns="0" anchor="t">
+            <a:normAutofit/>
+          </a:bodyPr>
+          <a:p>
+            <a:pPr marL="432000" indent="-324000">
+              <a:spcBef>
+                <a:spcPts val="1417"/>
+              </a:spcBef>
+              <a:buClr>
+                <a:srgbClr val="000000"/>
+              </a:buClr>
+              <a:buSzPct val="45000"/>
+              <a:buFont typeface="Wingdings" charset="2"/>
+              <a:buChar char=""/>
+            </a:pPr>
+            <a:r>
+              <a:rPr b="0" lang="en-US" sz="3200" spc="-1" strike="noStrike">
+                <a:latin typeface="Arial"/>
+              </a:rPr>
+              <a:t>Click to edit the outline text format</a:t>
+            </a:r>
+            <a:endParaRPr b="0" lang="en-US" sz="3200" spc="-1" strike="noStrike">
+              <a:latin typeface="Arial"/>
+            </a:endParaRPr>
+          </a:p>
+          <a:p>
+            <a:pPr lvl="1" marL="864000" indent="-324000">
+              <a:spcBef>
+                <a:spcPts val="1134"/>
+              </a:spcBef>
+              <a:buClr>
+                <a:srgbClr val="000000"/>
+              </a:buClr>
+              <a:buSzPct val="75000"/>
+              <a:buFont typeface="Symbol" charset="2"/>
+              <a:buChar char=""/>
+            </a:pPr>
+            <a:r>
+              <a:rPr b="0" lang="en-US" sz="2800" spc="-1" strike="noStrike">
+                <a:latin typeface="Arial"/>
+              </a:rPr>
+              <a:t>Second Outline Level</a:t>
+            </a:r>
+            <a:endParaRPr b="0" lang="en-US" sz="2800" spc="-1" strike="noStrike">
+              <a:latin typeface="Arial"/>
+            </a:endParaRPr>
+          </a:p>
+          <a:p>
+            <a:pPr lvl="2" marL="1296000" indent="-288000">
+              <a:spcBef>
+                <a:spcPts val="850"/>
+              </a:spcBef>
+              <a:buClr>
+                <a:srgbClr val="000000"/>
+              </a:buClr>
+              <a:buSzPct val="45000"/>
+              <a:buFont typeface="Wingdings" charset="2"/>
+              <a:buChar char=""/>
+            </a:pPr>
+            <a:r>
+              <a:rPr b="0" lang="en-US" sz="2400" spc="-1" strike="noStrike">
+                <a:latin typeface="Arial"/>
+              </a:rPr>
+              <a:t>Third Outline Level</a:t>
+            </a:r>
+            <a:endParaRPr b="0" lang="en-US" sz="2400" spc="-1" strike="noStrike">
+              <a:latin typeface="Arial"/>
+            </a:endParaRPr>
+          </a:p>
+          <a:p>
+            <a:pPr lvl="3" marL="1728000" indent="-216000">
+              <a:spcBef>
+                <a:spcPts val="567"/>
+              </a:spcBef>
+              <a:buClr>
+                <a:srgbClr val="000000"/>
+              </a:buClr>
+              <a:buSzPct val="75000"/>
+              <a:buFont typeface="Symbol" charset="2"/>
+              <a:buChar char=""/>
+            </a:pPr>
+            <a:r>
+              <a:rPr b="0" lang="en-US" sz="2000" spc="-1" strike="noStrike">
+                <a:latin typeface="Arial"/>
+              </a:rPr>
+              <a:t>Fourth Outline Level</a:t>
+            </a:r>
+            <a:endParaRPr b="0" lang="en-US" sz="2000" spc="-1" strike="noStrike">
+              <a:latin typeface="Arial"/>
+            </a:endParaRPr>
+          </a:p>
+          <a:p>
+            <a:pPr lvl="4" marL="2160000" indent="-216000">
+              <a:spcBef>
+                <a:spcPts val="283"/>
+              </a:spcBef>
+              <a:buClr>
+                <a:srgbClr val="000000"/>
+              </a:buClr>
+              <a:buSzPct val="45000"/>
+              <a:buFont typeface="Wingdings" charset="2"/>
+              <a:buChar char=""/>
+            </a:pPr>
+            <a:r>
+              <a:rPr b="0" lang="en-US" sz="2000" spc="-1" strike="noStrike">
+                <a:latin typeface="Arial"/>
+              </a:rPr>
+              <a:t>Fifth Outline Level</a:t>
+            </a:r>
+            <a:endParaRPr b="0" lang="en-US" sz="2000" spc="-1" strike="noStrike">
+              <a:latin typeface="Arial"/>
+            </a:endParaRPr>
+          </a:p>
+          <a:p>
+            <a:pPr lvl="5" marL="2592000" indent="-216000">
+              <a:spcBef>
+                <a:spcPts val="283"/>
+              </a:spcBef>
+              <a:buClr>
+                <a:srgbClr val="000000"/>
+              </a:buClr>
+              <a:buSzPct val="45000"/>
+              <a:buFont typeface="Wingdings" charset="2"/>
+              <a:buChar char=""/>
+            </a:pPr>
+            <a:r>
+              <a:rPr b="0" lang="en-US" sz="2000" spc="-1" strike="noStrike">
+                <a:latin typeface="Arial"/>
+              </a:rPr>
+              <a:t>Sixth Outline Level</a:t>
+            </a:r>
+            <a:endParaRPr b="0" lang="en-US" sz="2000" spc="-1" strike="noStrike">
+              <a:latin typeface="Arial"/>
+            </a:endParaRPr>
+          </a:p>
+          <a:p>
+            <a:pPr lvl="6" marL="3024000" indent="-216000">
+              <a:spcBef>
+                <a:spcPts val="283"/>
+              </a:spcBef>
+              <a:buClr>
+                <a:srgbClr val="000000"/>
+              </a:buClr>
+              <a:buSzPct val="45000"/>
+              <a:buFont typeface="Wingdings" charset="2"/>
+              <a:buChar char=""/>
+            </a:pPr>
+            <a:r>
+              <a:rPr b="0" lang="en-US" sz="2000" spc="-1" strike="noStrike">
+                <a:latin typeface="Arial"/>
+              </a:rPr>
+              <a:t>Seventh Outline Level</a:t>
+            </a:r>
+            <a:endParaRPr b="0" lang="en-US" sz="2000" spc="-1" strike="noStrike">
+              <a:latin typeface="Arial"/>
             </a:endParaRPr>
           </a:p>
         </p:txBody>
@@ -7698,7 +7698,7 @@
         <p:spPr>
           <a:xfrm>
             <a:off x="3124080" y="6356520"/>
-            <a:ext cx="2894760" cy="364320"/>
+            <a:ext cx="2894400" cy="363960"/>
           </a:xfrm>
           <a:prstGeom prst="rect">
             <a:avLst/>
@@ -7755,7 +7755,7 @@
         <p:spPr>
           <a:xfrm>
             <a:off x="6553080" y="6356520"/>
-            <a:ext cx="2133000" cy="364320"/>
+            <a:ext cx="2132640" cy="363960"/>
           </a:xfrm>
           <a:prstGeom prst="rect">
             <a:avLst/>
@@ -7790,7 +7790,7 @@
               </a:lnSpc>
               <a:buNone/>
             </a:pPr>
-            <a:fld id="{5105FA67-616D-4E2F-B18C-AD5AE957591E}" type="slidenum">
+            <a:fld id="{21C0AADB-F97E-4036-B3D8-58A1B0FDE82A}" type="slidenum">
               <a:rPr b="0" lang="en-US" sz="1200" spc="-1" strike="noStrike">
                 <a:solidFill>
                   <a:srgbClr val="8b8b8b"/>
@@ -7818,7 +7818,7 @@
         <p:spPr>
           <a:xfrm>
             <a:off x="457200" y="6356520"/>
-            <a:ext cx="2133000" cy="364320"/>
+            <a:ext cx="2132640" cy="363960"/>
           </a:xfrm>
           <a:prstGeom prst="rect">
             <a:avLst/>
@@ -8131,7 +8131,7 @@
         <p:spPr>
           <a:xfrm>
             <a:off x="0" y="0"/>
-            <a:ext cx="12188160" cy="599400"/>
+            <a:ext cx="12187800" cy="599040"/>
           </a:xfrm>
           <a:prstGeom prst="rect">
             <a:avLst/>
@@ -8166,7 +8166,7 @@
         <p:spPr>
           <a:xfrm>
             <a:off x="3317760" y="109800"/>
-            <a:ext cx="5068080" cy="516240"/>
+            <a:ext cx="5067720" cy="516240"/>
           </a:xfrm>
           <a:prstGeom prst="rect">
             <a:avLst/>
@@ -8218,7 +8218,7 @@
         <p:spPr>
           <a:xfrm>
             <a:off x="457200" y="914400"/>
-            <a:ext cx="10972080" cy="5302800"/>
+            <a:ext cx="10971720" cy="5302440"/>
           </a:xfrm>
           <a:prstGeom prst="roundRect">
             <a:avLst>
@@ -8294,7 +8294,7 @@
         <p:spPr>
           <a:xfrm rot="6000">
             <a:off x="2596680" y="2333880"/>
-            <a:ext cx="6393960" cy="638280"/>
+            <a:ext cx="6393600" cy="638280"/>
           </a:xfrm>
           <a:prstGeom prst="rect">
             <a:avLst/>
@@ -8338,780 +8338,6 @@
               <a:t>Client-focused Exploratory Data A</a:t>
             </a:r>
             <a:endParaRPr b="0" lang="en-US" sz="3600" spc="-1" strike="noStrike">
-              <a:latin typeface="Arial"/>
-            </a:endParaRPr>
-          </a:p>
-        </p:txBody>
-      </p:sp>
-    </p:spTree>
-  </p:cSld>
-  <mc:AlternateContent>
-    <mc:Choice Requires="p14">
-      <p:transition spd="slow" p14:dur="2000"/>
-    </mc:Choice>
-    <mc:Fallback>
-      <p:transition spd="slow"/>
-    </mc:Fallback>
-  </mc:AlternateContent>
-</p:sld>
-</file>
-
-<file path=ppt/slides/slide10.xml><?xml version="1.0" encoding="utf-8"?>
-<p:sld xmlns:a="http://schemas.openxmlformats.org/drawingml/2006/main" xmlns:p="http://schemas.openxmlformats.org/presentationml/2006/main" xmlns:r="http://schemas.openxmlformats.org/officeDocument/2006/relationships" xmlns:p14="http://schemas.microsoft.com/office/powerpoint/2010/main" xmlns:p15="http://schemas.microsoft.com/office/powerpoint/2012/main" xmlns:mc="http://schemas.openxmlformats.org/markup-compatibility/2006">
-  <p:cSld>
-    <p:bg>
-      <p:bgPr>
-        <a:solidFill>
-          <a:srgbClr val="f5f8fc"/>
-        </a:solidFill>
-      </p:bgPr>
-    </p:bg>
-    <p:spTree>
-      <p:nvGrpSpPr>
-        <p:cNvPr id="1" name=""/>
-        <p:cNvGrpSpPr/>
-        <p:nvPr/>
-      </p:nvGrpSpPr>
-      <p:grpSpPr>
-        <a:xfrm>
-          <a:off x="0" y="0"/>
-          <a:ext cx="0" cy="0"/>
-          <a:chOff x="0" y="0"/>
-          <a:chExt cx="0" cy="0"/>
-        </a:xfrm>
-      </p:grpSpPr>
-      <p:sp>
-        <p:nvSpPr>
-          <p:cNvPr id="166" name="Rectangle 1"/>
-          <p:cNvSpPr/>
-          <p:nvPr/>
-        </p:nvSpPr>
-        <p:spPr>
-          <a:xfrm>
-            <a:off x="0" y="0"/>
-            <a:ext cx="12188160" cy="599400"/>
-          </a:xfrm>
-          <a:prstGeom prst="rect">
-            <a:avLst/>
-          </a:prstGeom>
-          <a:solidFill>
-            <a:srgbClr val="0f2046"/>
-          </a:solidFill>
-          <a:ln w="9360">
-            <a:noFill/>
-          </a:ln>
-          <a:effectLst>
-            <a:outerShdw blurRad="39960" dir="5400000" dist="23040" rotWithShape="0">
-              <a:srgbClr val="000000">
-                <a:alpha val="35000"/>
-              </a:srgbClr>
-            </a:outerShdw>
-          </a:effectLst>
-        </p:spPr>
-        <p:style>
-          <a:lnRef idx="0"/>
-          <a:fillRef idx="0"/>
-          <a:effectRef idx="0"/>
-          <a:fontRef idx="minor"/>
-        </p:style>
-      </p:sp>
-      <p:sp>
-        <p:nvSpPr>
-          <p:cNvPr id="167" name="TextBox 2"/>
-          <p:cNvSpPr/>
-          <p:nvPr/>
-        </p:nvSpPr>
-        <p:spPr>
-          <a:xfrm>
-            <a:off x="4695480" y="109800"/>
-            <a:ext cx="2312640" cy="516240"/>
-          </a:xfrm>
-          <a:prstGeom prst="rect">
-            <a:avLst/>
-          </a:prstGeom>
-          <a:noFill/>
-          <a:ln w="0">
-            <a:noFill/>
-          </a:ln>
-        </p:spPr>
-        <p:style>
-          <a:lnRef idx="0"/>
-          <a:fillRef idx="0"/>
-          <a:effectRef idx="0"/>
-          <a:fontRef idx="minor"/>
-        </p:style>
-        <p:txBody>
-          <a:bodyPr wrap="none" lIns="90000" rIns="90000" tIns="45000" bIns="45000" anchor="t">
-            <a:spAutoFit/>
-          </a:bodyPr>
-          <a:p>
-            <a:pPr>
-              <a:lnSpc>
-                <a:spcPct val="100000"/>
-              </a:lnSpc>
-              <a:buNone/>
-            </a:pPr>
-            <a:r>
-              <a:rPr b="1" lang="en-US" sz="2800" spc="-1" strike="noStrike">
-                <a:solidFill>
-                  <a:srgbClr val="ffffff"/>
-                </a:solidFill>
-                <a:latin typeface="Calibri"/>
-                <a:ea typeface="DejaVu Sans"/>
-              </a:rPr>
-              <a:t>EDA Workflow</a:t>
-            </a:r>
-            <a:endParaRPr b="0" lang="en-US" sz="2800" spc="-1" strike="noStrike">
-              <a:latin typeface="Arial"/>
-            </a:endParaRPr>
-          </a:p>
-        </p:txBody>
-      </p:sp>
-      <p:sp>
-        <p:nvSpPr>
-          <p:cNvPr id="168" name="Rounded Rectangle 3"/>
-          <p:cNvSpPr/>
-          <p:nvPr/>
-        </p:nvSpPr>
-        <p:spPr>
-          <a:xfrm>
-            <a:off x="457200" y="914400"/>
-            <a:ext cx="10972080" cy="5302800"/>
-          </a:xfrm>
-          <a:prstGeom prst="roundRect">
-            <a:avLst>
-              <a:gd name="adj" fmla="val 16667"/>
-            </a:avLst>
-          </a:prstGeom>
-          <a:solidFill>
-            <a:srgbClr val="ffffff"/>
-          </a:solidFill>
-          <a:ln w="9360">
-            <a:solidFill>
-              <a:srgbClr val="2563eb"/>
-            </a:solidFill>
-            <a:round/>
-          </a:ln>
-          <a:effectLst>
-            <a:outerShdw blurRad="39960" dir="5400000" dist="23040" rotWithShape="0">
-              <a:srgbClr val="000000">
-                <a:alpha val="35000"/>
-              </a:srgbClr>
-            </a:outerShdw>
-          </a:effectLst>
-        </p:spPr>
-        <p:style>
-          <a:lnRef idx="0"/>
-          <a:fillRef idx="0"/>
-          <a:effectRef idx="0"/>
-          <a:fontRef idx="minor"/>
-        </p:style>
-      </p:sp>
-      <p:sp>
-        <p:nvSpPr>
-          <p:cNvPr id="169" name="TextBox 4"/>
-          <p:cNvSpPr/>
-          <p:nvPr/>
-        </p:nvSpPr>
-        <p:spPr>
-          <a:xfrm>
-            <a:off x="4599360" y="1188720"/>
-            <a:ext cx="2322000" cy="1765440"/>
-          </a:xfrm>
-          <a:prstGeom prst="rect">
-            <a:avLst/>
-          </a:prstGeom>
-          <a:noFill/>
-          <a:ln w="0">
-            <a:noFill/>
-          </a:ln>
-        </p:spPr>
-        <p:style>
-          <a:lnRef idx="0"/>
-          <a:fillRef idx="0"/>
-          <a:effectRef idx="0"/>
-          <a:fontRef idx="minor"/>
-        </p:style>
-        <p:txBody>
-          <a:bodyPr wrap="none" lIns="90000" rIns="90000" tIns="45000" bIns="45000" anchor="t">
-            <a:spAutoFit/>
-          </a:bodyPr>
-          <a:p>
-            <a:pPr>
-              <a:lnSpc>
-                <a:spcPct val="100000"/>
-              </a:lnSpc>
-              <a:buNone/>
-            </a:pPr>
-            <a:r>
-              <a:rPr b="0" lang="en-US" sz="2200" spc="-1" strike="noStrike">
-                <a:solidFill>
-                  <a:srgbClr val="464646"/>
-                </a:solidFill>
-                <a:latin typeface="Calibri"/>
-                <a:ea typeface="DejaVu Sans"/>
-              </a:rPr>
-              <a:t>Data Cleaning</a:t>
-            </a:r>
-            <a:endParaRPr b="0" lang="en-US" sz="2200" spc="-1" strike="noStrike">
-              <a:latin typeface="Arial"/>
-            </a:endParaRPr>
-          </a:p>
-          <a:p>
-            <a:pPr>
-              <a:lnSpc>
-                <a:spcPct val="100000"/>
-              </a:lnSpc>
-              <a:buNone/>
-            </a:pPr>
-            <a:r>
-              <a:rPr b="0" lang="en-US" sz="2200" spc="-1" strike="noStrike">
-                <a:solidFill>
-                  <a:srgbClr val="464646"/>
-                </a:solidFill>
-                <a:latin typeface="Calibri"/>
-                <a:ea typeface="DejaVu Sans"/>
-              </a:rPr>
-              <a:t>Univariate Analysis</a:t>
-            </a:r>
-            <a:endParaRPr b="0" lang="en-US" sz="2200" spc="-1" strike="noStrike">
-              <a:latin typeface="Arial"/>
-            </a:endParaRPr>
-          </a:p>
-          <a:p>
-            <a:pPr>
-              <a:lnSpc>
-                <a:spcPct val="100000"/>
-              </a:lnSpc>
-              <a:buNone/>
-            </a:pPr>
-            <a:r>
-              <a:rPr b="0" lang="en-US" sz="2200" spc="-1" strike="noStrike">
-                <a:solidFill>
-                  <a:srgbClr val="464646"/>
-                </a:solidFill>
-                <a:latin typeface="Calibri"/>
-                <a:ea typeface="DejaVu Sans"/>
-              </a:rPr>
-              <a:t>Bivariate Analysis</a:t>
-            </a:r>
-            <a:endParaRPr b="0" lang="en-US" sz="2200" spc="-1" strike="noStrike">
-              <a:latin typeface="Arial"/>
-            </a:endParaRPr>
-          </a:p>
-          <a:p>
-            <a:pPr>
-              <a:lnSpc>
-                <a:spcPct val="100000"/>
-              </a:lnSpc>
-              <a:buNone/>
-            </a:pPr>
-            <a:r>
-              <a:rPr b="0" lang="en-US" sz="2200" spc="-1" strike="noStrike">
-                <a:solidFill>
-                  <a:srgbClr val="464646"/>
-                </a:solidFill>
-                <a:latin typeface="Calibri"/>
-                <a:ea typeface="DejaVu Sans"/>
-              </a:rPr>
-              <a:t>Correlation</a:t>
-            </a:r>
-            <a:endParaRPr b="0" lang="en-US" sz="2200" spc="-1" strike="noStrike">
-              <a:latin typeface="Arial"/>
-            </a:endParaRPr>
-          </a:p>
-          <a:p>
-            <a:pPr>
-              <a:lnSpc>
-                <a:spcPct val="100000"/>
-              </a:lnSpc>
-              <a:buNone/>
-            </a:pPr>
-            <a:r>
-              <a:rPr b="0" lang="en-US" sz="2200" spc="-1" strike="noStrike">
-                <a:solidFill>
-                  <a:srgbClr val="464646"/>
-                </a:solidFill>
-                <a:latin typeface="Calibri"/>
-                <a:ea typeface="DejaVu Sans"/>
-              </a:rPr>
-              <a:t>Business Insights</a:t>
-            </a:r>
-            <a:endParaRPr b="0" lang="en-US" sz="2200" spc="-1" strike="noStrike">
-              <a:latin typeface="Arial"/>
-            </a:endParaRPr>
-          </a:p>
-        </p:txBody>
-      </p:sp>
-    </p:spTree>
-  </p:cSld>
-  <mc:AlternateContent>
-    <mc:Choice Requires="p14">
-      <p:transition spd="slow" p14:dur="2000"/>
-    </mc:Choice>
-    <mc:Fallback>
-      <p:transition spd="slow"/>
-    </mc:Fallback>
-  </mc:AlternateContent>
-</p:sld>
-</file>
-
-<file path=ppt/slides/slide11.xml><?xml version="1.0" encoding="utf-8"?>
-<p:sld xmlns:a="http://schemas.openxmlformats.org/drawingml/2006/main" xmlns:p="http://schemas.openxmlformats.org/presentationml/2006/main" xmlns:r="http://schemas.openxmlformats.org/officeDocument/2006/relationships" xmlns:p14="http://schemas.microsoft.com/office/powerpoint/2010/main" xmlns:p15="http://schemas.microsoft.com/office/powerpoint/2012/main" xmlns:mc="http://schemas.openxmlformats.org/markup-compatibility/2006">
-  <p:cSld>
-    <p:bg>
-      <p:bgPr>
-        <a:solidFill>
-          <a:srgbClr val="f5f8fc"/>
-        </a:solidFill>
-      </p:bgPr>
-    </p:bg>
-    <p:spTree>
-      <p:nvGrpSpPr>
-        <p:cNvPr id="1" name=""/>
-        <p:cNvGrpSpPr/>
-        <p:nvPr/>
-      </p:nvGrpSpPr>
-      <p:grpSpPr>
-        <a:xfrm>
-          <a:off x="0" y="0"/>
-          <a:ext cx="0" cy="0"/>
-          <a:chOff x="0" y="0"/>
-          <a:chExt cx="0" cy="0"/>
-        </a:xfrm>
-      </p:grpSpPr>
-      <p:sp>
-        <p:nvSpPr>
-          <p:cNvPr id="170" name="Rectangle 5"/>
-          <p:cNvSpPr/>
-          <p:nvPr/>
-        </p:nvSpPr>
-        <p:spPr>
-          <a:xfrm>
-            <a:off x="0" y="0"/>
-            <a:ext cx="12188160" cy="599400"/>
-          </a:xfrm>
-          <a:prstGeom prst="rect">
-            <a:avLst/>
-          </a:prstGeom>
-          <a:solidFill>
-            <a:srgbClr val="0f2046"/>
-          </a:solidFill>
-          <a:ln w="9360">
-            <a:noFill/>
-          </a:ln>
-          <a:effectLst>
-            <a:outerShdw blurRad="39960" dir="5400000" dist="23040" rotWithShape="0">
-              <a:srgbClr val="000000">
-                <a:alpha val="35000"/>
-              </a:srgbClr>
-            </a:outerShdw>
-          </a:effectLst>
-        </p:spPr>
-        <p:style>
-          <a:lnRef idx="0"/>
-          <a:fillRef idx="0"/>
-          <a:effectRef idx="0"/>
-          <a:fontRef idx="minor"/>
-        </p:style>
-      </p:sp>
-      <p:sp>
-        <p:nvSpPr>
-          <p:cNvPr id="171" name="TextBox 6"/>
-          <p:cNvSpPr/>
-          <p:nvPr/>
-        </p:nvSpPr>
-        <p:spPr>
-          <a:xfrm>
-            <a:off x="4144320" y="109800"/>
-            <a:ext cx="3414600" cy="516240"/>
-          </a:xfrm>
-          <a:prstGeom prst="rect">
-            <a:avLst/>
-          </a:prstGeom>
-          <a:noFill/>
-          <a:ln w="0">
-            <a:noFill/>
-          </a:ln>
-        </p:spPr>
-        <p:style>
-          <a:lnRef idx="0"/>
-          <a:fillRef idx="0"/>
-          <a:effectRef idx="0"/>
-          <a:fontRef idx="minor"/>
-        </p:style>
-        <p:txBody>
-          <a:bodyPr wrap="none" lIns="90000" rIns="90000" tIns="45000" bIns="45000" anchor="t">
-            <a:spAutoFit/>
-          </a:bodyPr>
-          <a:p>
-            <a:pPr>
-              <a:lnSpc>
-                <a:spcPct val="100000"/>
-              </a:lnSpc>
-              <a:buNone/>
-            </a:pPr>
-            <a:r>
-              <a:rPr b="1" lang="en-US" sz="2800" spc="-1" strike="noStrike">
-                <a:solidFill>
-                  <a:srgbClr val="ffffff"/>
-                </a:solidFill>
-                <a:latin typeface="Calibri"/>
-                <a:ea typeface="DejaVu Sans"/>
-              </a:rPr>
-              <a:t>Expected Deliverables</a:t>
-            </a:r>
-            <a:endParaRPr b="0" lang="en-US" sz="2800" spc="-1" strike="noStrike">
-              <a:latin typeface="Arial"/>
-            </a:endParaRPr>
-          </a:p>
-        </p:txBody>
-      </p:sp>
-      <p:sp>
-        <p:nvSpPr>
-          <p:cNvPr id="172" name="Rounded Rectangle 2"/>
-          <p:cNvSpPr/>
-          <p:nvPr/>
-        </p:nvSpPr>
-        <p:spPr>
-          <a:xfrm>
-            <a:off x="457200" y="914400"/>
-            <a:ext cx="10972080" cy="5302800"/>
-          </a:xfrm>
-          <a:prstGeom prst="roundRect">
-            <a:avLst>
-              <a:gd name="adj" fmla="val 16667"/>
-            </a:avLst>
-          </a:prstGeom>
-          <a:solidFill>
-            <a:srgbClr val="ffffff"/>
-          </a:solidFill>
-          <a:ln w="9360">
-            <a:solidFill>
-              <a:srgbClr val="2563eb"/>
-            </a:solidFill>
-            <a:round/>
-          </a:ln>
-          <a:effectLst>
-            <a:outerShdw blurRad="39960" dir="5400000" dist="23040" rotWithShape="0">
-              <a:srgbClr val="000000">
-                <a:alpha val="35000"/>
-              </a:srgbClr>
-            </a:outerShdw>
-          </a:effectLst>
-        </p:spPr>
-        <p:style>
-          <a:lnRef idx="0"/>
-          <a:fillRef idx="0"/>
-          <a:effectRef idx="0"/>
-          <a:fontRef idx="minor"/>
-        </p:style>
-      </p:sp>
-      <p:sp>
-        <p:nvSpPr>
-          <p:cNvPr id="173" name="TextBox 8"/>
-          <p:cNvSpPr/>
-          <p:nvPr/>
-        </p:nvSpPr>
-        <p:spPr>
-          <a:xfrm>
-            <a:off x="4239720" y="1188720"/>
-            <a:ext cx="3041280" cy="1095120"/>
-          </a:xfrm>
-          <a:prstGeom prst="rect">
-            <a:avLst/>
-          </a:prstGeom>
-          <a:noFill/>
-          <a:ln w="0">
-            <a:noFill/>
-          </a:ln>
-        </p:spPr>
-        <p:style>
-          <a:lnRef idx="0"/>
-          <a:fillRef idx="0"/>
-          <a:effectRef idx="0"/>
-          <a:fontRef idx="minor"/>
-        </p:style>
-        <p:txBody>
-          <a:bodyPr wrap="none" lIns="90000" rIns="90000" tIns="45000" bIns="45000" anchor="t">
-            <a:spAutoFit/>
-          </a:bodyPr>
-          <a:p>
-            <a:pPr>
-              <a:lnSpc>
-                <a:spcPct val="100000"/>
-              </a:lnSpc>
-              <a:buNone/>
-            </a:pPr>
-            <a:r>
-              <a:rPr b="0" lang="en-US" sz="2200" spc="-1" strike="noStrike">
-                <a:solidFill>
-                  <a:srgbClr val="464646"/>
-                </a:solidFill>
-                <a:latin typeface="Calibri"/>
-                <a:ea typeface="DejaVu Sans"/>
-              </a:rPr>
-              <a:t>Pricing strategy</a:t>
-            </a:r>
-            <a:endParaRPr b="0" lang="en-US" sz="2200" spc="-1" strike="noStrike">
-              <a:latin typeface="Arial"/>
-            </a:endParaRPr>
-          </a:p>
-          <a:p>
-            <a:pPr>
-              <a:lnSpc>
-                <a:spcPct val="100000"/>
-              </a:lnSpc>
-              <a:buNone/>
-            </a:pPr>
-            <a:r>
-              <a:rPr b="0" lang="en-US" sz="2200" spc="-1" strike="noStrike">
-                <a:solidFill>
-                  <a:srgbClr val="464646"/>
-                </a:solidFill>
-                <a:latin typeface="Calibri"/>
-                <a:ea typeface="DejaVu Sans"/>
-              </a:rPr>
-              <a:t>Renovation strategy</a:t>
-            </a:r>
-            <a:endParaRPr b="0" lang="en-US" sz="2200" spc="-1" strike="noStrike">
-              <a:latin typeface="Arial"/>
-            </a:endParaRPr>
-          </a:p>
-          <a:p>
-            <a:pPr>
-              <a:lnSpc>
-                <a:spcPct val="100000"/>
-              </a:lnSpc>
-              <a:buNone/>
-            </a:pPr>
-            <a:r>
-              <a:rPr b="0" lang="en-US" sz="2200" spc="-1" strike="noStrike">
-                <a:solidFill>
-                  <a:srgbClr val="464646"/>
-                </a:solidFill>
-                <a:latin typeface="Calibri"/>
-                <a:ea typeface="DejaVu Sans"/>
-              </a:rPr>
-              <a:t>Selling recommendations</a:t>
-            </a:r>
-            <a:endParaRPr b="0" lang="en-US" sz="2200" spc="-1" strike="noStrike">
-              <a:latin typeface="Arial"/>
-            </a:endParaRPr>
-          </a:p>
-        </p:txBody>
-      </p:sp>
-    </p:spTree>
-  </p:cSld>
-  <mc:AlternateContent>
-    <mc:Choice Requires="p14">
-      <p:transition spd="slow" p14:dur="2000"/>
-    </mc:Choice>
-    <mc:Fallback>
-      <p:transition spd="slow"/>
-    </mc:Fallback>
-  </mc:AlternateContent>
-</p:sld>
-</file>
-
-<file path=ppt/slides/slide12.xml><?xml version="1.0" encoding="utf-8"?>
-<p:sld xmlns:a="http://schemas.openxmlformats.org/drawingml/2006/main" xmlns:p="http://schemas.openxmlformats.org/presentationml/2006/main" xmlns:r="http://schemas.openxmlformats.org/officeDocument/2006/relationships" xmlns:p14="http://schemas.microsoft.com/office/powerpoint/2010/main" xmlns:p15="http://schemas.microsoft.com/office/powerpoint/2012/main" xmlns:mc="http://schemas.openxmlformats.org/markup-compatibility/2006">
-  <p:cSld>
-    <p:bg>
-      <p:bgPr>
-        <a:solidFill>
-          <a:srgbClr val="f5f8fc"/>
-        </a:solidFill>
-      </p:bgPr>
-    </p:bg>
-    <p:spTree>
-      <p:nvGrpSpPr>
-        <p:cNvPr id="1" name=""/>
-        <p:cNvGrpSpPr/>
-        <p:nvPr/>
-      </p:nvGrpSpPr>
-      <p:grpSpPr>
-        <a:xfrm>
-          <a:off x="0" y="0"/>
-          <a:ext cx="0" cy="0"/>
-          <a:chOff x="0" y="0"/>
-          <a:chExt cx="0" cy="0"/>
-        </a:xfrm>
-      </p:grpSpPr>
-      <p:sp>
-        <p:nvSpPr>
-          <p:cNvPr id="174" name="Rectangle 2"/>
-          <p:cNvSpPr/>
-          <p:nvPr/>
-        </p:nvSpPr>
-        <p:spPr>
-          <a:xfrm>
-            <a:off x="0" y="0"/>
-            <a:ext cx="12188160" cy="599400"/>
-          </a:xfrm>
-          <a:prstGeom prst="rect">
-            <a:avLst/>
-          </a:prstGeom>
-          <a:solidFill>
-            <a:srgbClr val="0f2046"/>
-          </a:solidFill>
-          <a:ln w="9360">
-            <a:noFill/>
-          </a:ln>
-          <a:effectLst>
-            <a:outerShdw blurRad="39960" dir="5400000" dist="23040" rotWithShape="0">
-              <a:srgbClr val="000000">
-                <a:alpha val="35000"/>
-              </a:srgbClr>
-            </a:outerShdw>
-          </a:effectLst>
-        </p:spPr>
-        <p:style>
-          <a:lnRef idx="0"/>
-          <a:fillRef idx="0"/>
-          <a:effectRef idx="0"/>
-          <a:fontRef idx="minor"/>
-        </p:style>
-      </p:sp>
-      <p:sp>
-        <p:nvSpPr>
-          <p:cNvPr id="175" name="TextBox 3"/>
-          <p:cNvSpPr/>
-          <p:nvPr/>
-        </p:nvSpPr>
-        <p:spPr>
-          <a:xfrm>
-            <a:off x="5001480" y="109800"/>
-            <a:ext cx="1700280" cy="516240"/>
-          </a:xfrm>
-          <a:prstGeom prst="rect">
-            <a:avLst/>
-          </a:prstGeom>
-          <a:noFill/>
-          <a:ln w="0">
-            <a:noFill/>
-          </a:ln>
-        </p:spPr>
-        <p:style>
-          <a:lnRef idx="0"/>
-          <a:fillRef idx="0"/>
-          <a:effectRef idx="0"/>
-          <a:fontRef idx="minor"/>
-        </p:style>
-        <p:txBody>
-          <a:bodyPr wrap="none" lIns="90000" rIns="90000" tIns="45000" bIns="45000" anchor="t">
-            <a:spAutoFit/>
-          </a:bodyPr>
-          <a:p>
-            <a:pPr>
-              <a:lnSpc>
-                <a:spcPct val="100000"/>
-              </a:lnSpc>
-              <a:buNone/>
-            </a:pPr>
-            <a:r>
-              <a:rPr b="1" lang="en-US" sz="2800" spc="-1" strike="noStrike">
-                <a:solidFill>
-                  <a:srgbClr val="ffffff"/>
-                </a:solidFill>
-                <a:latin typeface="Calibri"/>
-                <a:ea typeface="DejaVu Sans"/>
-              </a:rPr>
-              <a:t>Thank You</a:t>
-            </a:r>
-            <a:endParaRPr b="0" lang="en-US" sz="2800" spc="-1" strike="noStrike">
-              <a:latin typeface="Arial"/>
-            </a:endParaRPr>
-          </a:p>
-        </p:txBody>
-      </p:sp>
-      <p:sp>
-        <p:nvSpPr>
-          <p:cNvPr id="176" name="Rounded Rectangle 1"/>
-          <p:cNvSpPr/>
-          <p:nvPr/>
-        </p:nvSpPr>
-        <p:spPr>
-          <a:xfrm>
-            <a:off x="457200" y="914400"/>
-            <a:ext cx="10972080" cy="5302800"/>
-          </a:xfrm>
-          <a:prstGeom prst="roundRect">
-            <a:avLst>
-              <a:gd name="adj" fmla="val 16667"/>
-            </a:avLst>
-          </a:prstGeom>
-          <a:solidFill>
-            <a:srgbClr val="ffffff"/>
-          </a:solidFill>
-          <a:ln w="9360">
-            <a:solidFill>
-              <a:srgbClr val="2563eb"/>
-            </a:solidFill>
-            <a:round/>
-          </a:ln>
-          <a:effectLst>
-            <a:outerShdw blurRad="39960" dir="5400000" dist="23040" rotWithShape="0">
-              <a:srgbClr val="000000">
-                <a:alpha val="35000"/>
-              </a:srgbClr>
-            </a:outerShdw>
-          </a:effectLst>
-        </p:spPr>
-        <p:style>
-          <a:lnRef idx="0"/>
-          <a:fillRef idx="0"/>
-          <a:effectRef idx="0"/>
-          <a:fontRef idx="minor"/>
-        </p:style>
-      </p:sp>
-      <p:sp>
-        <p:nvSpPr>
-          <p:cNvPr id="177" name="TextBox 5"/>
-          <p:cNvSpPr/>
-          <p:nvPr/>
-        </p:nvSpPr>
-        <p:spPr>
-          <a:xfrm>
-            <a:off x="5036040" y="1188720"/>
-            <a:ext cx="1448640" cy="424800"/>
-          </a:xfrm>
-          <a:prstGeom prst="rect">
-            <a:avLst/>
-          </a:prstGeom>
-          <a:noFill/>
-          <a:ln w="0">
-            <a:noFill/>
-          </a:ln>
-        </p:spPr>
-        <p:style>
-          <a:lnRef idx="0"/>
-          <a:fillRef idx="0"/>
-          <a:effectRef idx="0"/>
-          <a:fontRef idx="minor"/>
-        </p:style>
-        <p:txBody>
-          <a:bodyPr wrap="none" lIns="90000" rIns="90000" tIns="45000" bIns="45000" anchor="t">
-            <a:spAutoFit/>
-          </a:bodyPr>
-          <a:p>
-            <a:pPr>
-              <a:lnSpc>
-                <a:spcPct val="100000"/>
-              </a:lnSpc>
-              <a:buNone/>
-            </a:pPr>
-            <a:r>
-              <a:rPr b="0" lang="en-US" sz="2200" spc="-1" strike="noStrike">
-                <a:solidFill>
-                  <a:srgbClr val="464646"/>
-                </a:solidFill>
-                <a:latin typeface="Calibri"/>
-                <a:ea typeface="DejaVu Sans"/>
-              </a:rPr>
-              <a:t>Questions?</a:t>
-            </a:r>
-            <a:endParaRPr b="0" lang="en-US" sz="2200" spc="-1" strike="noStrike">
               <a:latin typeface="Arial"/>
             </a:endParaRPr>
           </a:p>
@@ -9163,7 +8389,7 @@
         <p:spPr>
           <a:xfrm>
             <a:off x="0" y="0"/>
-            <a:ext cx="12188160" cy="599400"/>
+            <a:ext cx="12187800" cy="599040"/>
           </a:xfrm>
           <a:prstGeom prst="rect">
             <a:avLst/>
@@ -9198,7 +8424,7 @@
         <p:spPr>
           <a:xfrm>
             <a:off x="4421880" y="109800"/>
-            <a:ext cx="2861280" cy="516240"/>
+            <a:ext cx="2860920" cy="516240"/>
           </a:xfrm>
           <a:prstGeom prst="rect">
             <a:avLst/>
@@ -9250,7 +8476,7 @@
         <p:spPr>
           <a:xfrm>
             <a:off x="457200" y="914400"/>
-            <a:ext cx="10972080" cy="5302800"/>
+            <a:ext cx="10971720" cy="5302440"/>
           </a:xfrm>
           <a:prstGeom prst="roundRect">
             <a:avLst>
@@ -9327,7 +8553,7 @@
         <p:spPr>
           <a:xfrm>
             <a:off x="2840400" y="1897920"/>
-            <a:ext cx="5933880" cy="2927880"/>
+            <a:ext cx="5933520" cy="3517560"/>
           </a:xfrm>
           <a:prstGeom prst="rect">
             <a:avLst/>
@@ -9363,6 +8589,7 @@
                   <a:srgbClr val="000000"/>
                 </a:solidFill>
                 <a:latin typeface="Calibri"/>
+                <a:ea typeface="DejaVu Sans"/>
               </a:rPr>
               <a:t>Client: Timothy Stevens</a:t>
             </a:r>
@@ -9375,6 +8602,7 @@
                   <a:srgbClr val="000000"/>
                 </a:solidFill>
                 <a:latin typeface="Calibri"/>
+                <a:ea typeface="DejaVu Sans"/>
               </a:rPr>
               <a:t>Role: Seller</a:t>
             </a:r>
@@ -9393,6 +8621,7 @@
                   <a:srgbClr val="ffffff"/>
                 </a:highlight>
                 <a:latin typeface="Calibri"/>
+                <a:ea typeface="DejaVu Sans"/>
               </a:rPr>
               <a:t>Business Scenario:</a:t>
             </a:r>
@@ -9405,6 +8634,7 @@
                   <a:srgbClr val="000000"/>
                 </a:solidFill>
                 <a:latin typeface="Calibri"/>
+                <a:ea typeface="DejaVu Sans"/>
               </a:rPr>
               <a:t>• Owns expensive houses in the city center.</a:t>
             </a:r>
@@ -9417,6 +8647,7 @@
                   <a:srgbClr val="000000"/>
                 </a:solidFill>
                 <a:latin typeface="Calibri"/>
+                <a:ea typeface="DejaVu Sans"/>
               </a:rPr>
               <a:t>• Wants to sell them within the next year.</a:t>
             </a:r>
@@ -9429,15 +8660,12 @@
                   <a:srgbClr val="000000"/>
                 </a:solidFill>
                 <a:latin typeface="Calibri"/>
+                <a:ea typeface="DejaVu Sans"/>
               </a:rPr>
               <a:t>• Open to renovating properties if it increases profit.</a:t>
             </a:r>
             <a:endParaRPr b="0" lang="en-US" sz="2200" spc="-1" strike="noStrike">
-              <a:solidFill>
-                <a:srgbClr val="000000"/>
-              </a:solidFill>
-              <a:latin typeface="Calibri"/>
-              <a:ea typeface="DejaVu Sans"/>
+              <a:latin typeface="Arial"/>
             </a:endParaRPr>
           </a:p>
         </p:txBody>
@@ -9488,7 +8716,7 @@
         <p:spPr>
           <a:xfrm>
             <a:off x="0" y="0"/>
-            <a:ext cx="12188160" cy="599400"/>
+            <a:ext cx="12187800" cy="599040"/>
           </a:xfrm>
           <a:prstGeom prst="rect">
             <a:avLst/>
@@ -9575,7 +8803,7 @@
         <p:spPr>
           <a:xfrm>
             <a:off x="457200" y="914400"/>
-            <a:ext cx="10972080" cy="5302800"/>
+            <a:ext cx="10971720" cy="5302440"/>
           </a:xfrm>
           <a:prstGeom prst="roundRect">
             <a:avLst>
@@ -9607,8 +8835,8 @@
         </p:nvSpPr>
         <p:spPr>
           <a:xfrm>
-            <a:off x="2477520" y="2823480"/>
-            <a:ext cx="6652800" cy="684360"/>
+            <a:off x="2423160" y="2823840"/>
+            <a:ext cx="6761160" cy="683640"/>
           </a:xfrm>
           <a:prstGeom prst="rect">
             <a:avLst/>
@@ -9673,8 +8901,8 @@
         </p:nvSpPr>
         <p:spPr>
           <a:xfrm>
-            <a:off x="2417040" y="3579480"/>
-            <a:ext cx="7206120" cy="684360"/>
+            <a:off x="2361960" y="3579840"/>
+            <a:ext cx="7315920" cy="683640"/>
           </a:xfrm>
           <a:prstGeom prst="rect">
             <a:avLst/>
@@ -9777,7 +9005,7 @@
         <p:spPr>
           <a:xfrm>
             <a:off x="0" y="0"/>
-            <a:ext cx="12188160" cy="599400"/>
+            <a:ext cx="12187800" cy="599040"/>
           </a:xfrm>
           <a:prstGeom prst="rect">
             <a:avLst/>
@@ -9812,7 +9040,7 @@
         <p:spPr>
           <a:xfrm>
             <a:off x="5197320" y="109800"/>
-            <a:ext cx="1314720" cy="516240"/>
+            <a:ext cx="1314360" cy="516240"/>
           </a:xfrm>
           <a:prstGeom prst="rect">
             <a:avLst/>
@@ -9864,7 +9092,7 @@
         <p:spPr>
           <a:xfrm>
             <a:off x="360" y="914400"/>
-            <a:ext cx="10972080" cy="5302800"/>
+            <a:ext cx="10971720" cy="5302440"/>
           </a:xfrm>
           <a:prstGeom prst="roundRect">
             <a:avLst>
@@ -9904,7 +9132,7 @@
         <p:spPr>
           <a:xfrm>
             <a:off x="2471760" y="1707480"/>
-            <a:ext cx="6319080" cy="3106080"/>
+            <a:ext cx="6318720" cy="3106080"/>
           </a:xfrm>
           <a:prstGeom prst="rect">
             <a:avLst/>
@@ -10294,14 +9522,14 @@
       </p:grpSpPr>
       <p:sp>
         <p:nvSpPr>
-          <p:cNvPr id="140" name="Rectangle 4"/>
+          <p:cNvPr id="140" name="Rectangle 1"/>
           <p:cNvSpPr/>
           <p:nvPr/>
         </p:nvSpPr>
         <p:spPr>
           <a:xfrm>
             <a:off x="0" y="0"/>
-            <a:ext cx="12188160" cy="599400"/>
+            <a:ext cx="12187800" cy="599040"/>
           </a:xfrm>
           <a:prstGeom prst="rect">
             <a:avLst/>
@@ -10329,14 +9557,14 @@
       </p:sp>
       <p:sp>
         <p:nvSpPr>
-          <p:cNvPr id="141" name="TextBox 9"/>
+          <p:cNvPr id="141" name="TextBox 2"/>
           <p:cNvSpPr/>
           <p:nvPr/>
         </p:nvSpPr>
         <p:spPr>
           <a:xfrm>
-            <a:off x="3880440" y="109800"/>
-            <a:ext cx="3939480" cy="516240"/>
+            <a:off x="4315680" y="109800"/>
+            <a:ext cx="3071520" cy="516240"/>
           </a:xfrm>
           <a:prstGeom prst="rect">
             <a:avLst/>
@@ -10371,7 +9599,7 @@
                 <a:latin typeface="Calibri"/>
                 <a:ea typeface="DejaVu Sans"/>
               </a:rPr>
-              <a:t>Fields &amp; Simple meanings</a:t>
+              <a:t>Research Questions</a:t>
             </a:r>
             <a:endParaRPr b="0" lang="en-US" sz="2800" spc="-1" strike="noStrike">
               <a:latin typeface="Arial"/>
@@ -10381,14 +9609,14 @@
       </p:sp>
       <p:sp>
         <p:nvSpPr>
-          <p:cNvPr id="142" name="Rounded Rectangle 5"/>
+          <p:cNvPr id="142" name="Rounded Rectangle 3"/>
           <p:cNvSpPr/>
           <p:nvPr/>
         </p:nvSpPr>
         <p:spPr>
           <a:xfrm>
-            <a:off x="385200" y="914400"/>
-            <a:ext cx="10972080" cy="5302800"/>
+            <a:off x="457200" y="914400"/>
+            <a:ext cx="10971720" cy="5302440"/>
           </a:xfrm>
           <a:prstGeom prst="roundRect">
             <a:avLst>
@@ -10421,14 +9649,14 @@
       </p:sp>
       <p:sp>
         <p:nvSpPr>
-          <p:cNvPr id="143" name="TextBox 10"/>
+          <p:cNvPr id="143" name="TextBox 4"/>
           <p:cNvSpPr/>
           <p:nvPr/>
         </p:nvSpPr>
         <p:spPr>
           <a:xfrm>
-            <a:off x="6019200" y="1301760"/>
-            <a:ext cx="5278320" cy="4446720"/>
+            <a:off x="2211120" y="2268720"/>
+            <a:ext cx="7097760" cy="2465640"/>
           </a:xfrm>
           <a:prstGeom prst="rect">
             <a:avLst/>
@@ -10451,1233 +9679,73 @@
           <a:p>
             <a:pPr>
               <a:lnSpc>
-                <a:spcPct val="100000"/>
+                <a:spcPct val="150000"/>
               </a:lnSpc>
+              <a:spcBef>
+                <a:spcPts val="439"/>
+              </a:spcBef>
               <a:buNone/>
             </a:pPr>
-            <a:endParaRPr b="0" lang="en-US" sz="2200" spc="-1" strike="noStrike">
-              <a:latin typeface="Arial"/>
-            </a:endParaRPr>
-          </a:p>
-          <a:p>
-            <a:pPr marL="216000" indent="-216000">
-              <a:lnSpc>
-                <a:spcPct val="100000"/>
-              </a:lnSpc>
-              <a:buClr>
-                <a:srgbClr val="464646"/>
-              </a:buClr>
-              <a:buFont typeface="Symbol"/>
-              <a:buChar char=""/>
-            </a:pPr>
-            <a:r>
-              <a:rPr b="1" lang="en-US" sz="2200" spc="-1" strike="noStrike">
+            <a:r>
+              <a:rPr b="0" lang="en-US" sz="2600" spc="-1" strike="noStrike">
                 <a:solidFill>
-                  <a:srgbClr val="2a6099"/>
+                  <a:srgbClr val="000000"/>
                 </a:solidFill>
                 <a:latin typeface="Calibri"/>
                 <a:ea typeface="DejaVu Sans"/>
               </a:rPr>
-              <a:t>sqft_basement</a:t>
-            </a:r>
-            <a:r>
-              <a:rPr b="0" lang="en-US" sz="2200" spc="-1" strike="noStrike">
+              <a:t>• </a:t>
+            </a:r>
+            <a:r>
+              <a:rPr b="0" lang="en-US" sz="2600" spc="-1" strike="noStrike">
                 <a:solidFill>
-                  <a:srgbClr val="464646"/>
+                  <a:srgbClr val="000000"/>
                 </a:solidFill>
                 <a:latin typeface="Calibri"/>
                 <a:ea typeface="DejaVu Sans"/>
               </a:rPr>
-              <a:t> (</a:t>
-            </a:r>
-            <a:r>
-              <a:rPr b="0" lang="en-US" sz="2000" spc="-1" strike="noStrike">
+              <a:t>Does grade affect house prices?</a:t>
+            </a:r>
+            <a:br>
+              <a:rPr sz="2600"/>
+            </a:br>
+            <a:r>
+              <a:rPr b="0" lang="en-US" sz="2600" spc="-1" strike="noStrike">
                 <a:solidFill>
-                  <a:srgbClr val="464646"/>
+                  <a:srgbClr val="000000"/>
                 </a:solidFill>
                 <a:latin typeface="Calibri"/>
                 <a:ea typeface="DejaVu Sans"/>
               </a:rPr>
-              <a:t>Basement area</a:t>
-            </a:r>
-            <a:r>
-              <a:rPr b="0" lang="en-US" sz="2200" spc="-1" strike="noStrike">
+              <a:t>• Should houses be renovated before selling?</a:t>
+            </a:r>
+            <a:br>
+              <a:rPr sz="2600"/>
+            </a:br>
+            <a:r>
+              <a:rPr b="0" lang="en-US" sz="2600" spc="-1" strike="noStrike">
                 <a:solidFill>
-                  <a:srgbClr val="464646"/>
+                  <a:srgbClr val="000000"/>
                 </a:solidFill>
                 <a:latin typeface="Calibri"/>
                 <a:ea typeface="DejaVu Sans"/>
               </a:rPr>
-              <a:t>)</a:t>
-            </a:r>
-            <a:endParaRPr b="0" lang="en-US" sz="2200" spc="-1" strike="noStrike">
-              <a:latin typeface="Arial"/>
-            </a:endParaRPr>
-          </a:p>
-          <a:p>
-            <a:pPr marL="216000" indent="-216000">
-              <a:lnSpc>
-                <a:spcPct val="100000"/>
-              </a:lnSpc>
-              <a:buClr>
-                <a:srgbClr val="464646"/>
-              </a:buClr>
-              <a:buFont typeface="Symbol"/>
-              <a:buChar char=""/>
-            </a:pPr>
-            <a:r>
-              <a:rPr b="1" lang="en-US" sz="2200" spc="-1" strike="noStrike">
+              <a:t>• Does location affect house prices?</a:t>
+            </a:r>
+            <a:br>
+              <a:rPr sz="2600"/>
+            </a:br>
+            <a:r>
+              <a:rPr b="0" lang="en-US" sz="2600" spc="-1" strike="noStrike">
                 <a:solidFill>
-                  <a:srgbClr val="2a6099"/>
+                  <a:srgbClr val="000000"/>
                 </a:solidFill>
                 <a:latin typeface="Calibri"/>
                 <a:ea typeface="DejaVu Sans"/>
               </a:rPr>
-              <a:t>yr_built</a:t>
-            </a:r>
-            <a:r>
-              <a:rPr b="0" lang="en-US" sz="2200" spc="-1" strike="noStrike">
-                <a:solidFill>
-                  <a:srgbClr val="464646"/>
-                </a:solidFill>
-                <a:latin typeface="Calibri"/>
-                <a:ea typeface="DejaVu Sans"/>
-              </a:rPr>
-              <a:t> (</a:t>
-            </a:r>
-            <a:r>
-              <a:rPr b="0" lang="en-US" sz="2000" spc="-1" strike="noStrike">
-                <a:solidFill>
-                  <a:srgbClr val="464646"/>
-                </a:solidFill>
-                <a:latin typeface="Calibri"/>
-                <a:ea typeface="DejaVu Sans"/>
-              </a:rPr>
-              <a:t>Year the house was buil</a:t>
-            </a:r>
-            <a:r>
-              <a:rPr b="0" lang="en-US" sz="2200" spc="-1" strike="noStrike">
-                <a:solidFill>
-                  <a:srgbClr val="464646"/>
-                </a:solidFill>
-                <a:latin typeface="Calibri"/>
-                <a:ea typeface="DejaVu Sans"/>
-              </a:rPr>
-              <a:t>t)</a:t>
-            </a:r>
-            <a:endParaRPr b="0" lang="en-US" sz="2200" spc="-1" strike="noStrike">
-              <a:latin typeface="Arial"/>
-            </a:endParaRPr>
-          </a:p>
-          <a:p>
-            <a:pPr marL="216000" indent="-216000">
-              <a:lnSpc>
-                <a:spcPct val="100000"/>
-              </a:lnSpc>
-              <a:buClr>
-                <a:srgbClr val="464646"/>
-              </a:buClr>
-              <a:buFont typeface="Symbol"/>
-              <a:buChar char=""/>
-            </a:pPr>
-            <a:r>
-              <a:rPr b="1" lang="en-US" sz="2200" spc="-1" strike="noStrike">
-                <a:solidFill>
-                  <a:srgbClr val="2a6099"/>
-                </a:solidFill>
-                <a:latin typeface="Calibri"/>
-                <a:ea typeface="DejaVu Sans"/>
-              </a:rPr>
-              <a:t>yr_renovated</a:t>
-            </a:r>
-            <a:r>
-              <a:rPr b="0" lang="en-US" sz="2200" spc="-1" strike="noStrike">
-                <a:solidFill>
-                  <a:srgbClr val="464646"/>
-                </a:solidFill>
-                <a:latin typeface="Calibri"/>
-                <a:ea typeface="DejaVu Sans"/>
-              </a:rPr>
-              <a:t> (</a:t>
-            </a:r>
-            <a:r>
-              <a:rPr b="0" lang="en-US" sz="2000" spc="-1" strike="noStrike">
-                <a:solidFill>
-                  <a:srgbClr val="464646"/>
-                </a:solidFill>
-                <a:latin typeface="Calibri"/>
-                <a:ea typeface="DejaVu Sans"/>
-              </a:rPr>
-              <a:t>Year the house was renovated</a:t>
-            </a:r>
-            <a:r>
-              <a:rPr b="0" lang="en-US" sz="2200" spc="-1" strike="noStrike">
-                <a:solidFill>
-                  <a:srgbClr val="464646"/>
-                </a:solidFill>
-                <a:latin typeface="Calibri"/>
-                <a:ea typeface="DejaVu Sans"/>
-              </a:rPr>
-              <a:t>)</a:t>
-            </a:r>
-            <a:endParaRPr b="0" lang="en-US" sz="2200" spc="-1" strike="noStrike">
-              <a:latin typeface="Arial"/>
-            </a:endParaRPr>
-          </a:p>
-          <a:p>
-            <a:pPr marL="216000" indent="-216000">
-              <a:lnSpc>
-                <a:spcPct val="100000"/>
-              </a:lnSpc>
-              <a:buClr>
-                <a:srgbClr val="464646"/>
-              </a:buClr>
-              <a:buFont typeface="Symbol"/>
-              <a:buChar char=""/>
-            </a:pPr>
-            <a:r>
-              <a:rPr b="1" lang="en-US" sz="2200" spc="-1" strike="noStrike">
-                <a:solidFill>
-                  <a:srgbClr val="2a6099"/>
-                </a:solidFill>
-                <a:latin typeface="Calibri"/>
-                <a:ea typeface="DejaVu Sans"/>
-              </a:rPr>
-              <a:t>zipcode</a:t>
-            </a:r>
-            <a:r>
-              <a:rPr b="0" lang="en-US" sz="2200" spc="-1" strike="noStrike">
-                <a:solidFill>
-                  <a:srgbClr val="464646"/>
-                </a:solidFill>
-                <a:latin typeface="Calibri"/>
-                <a:ea typeface="DejaVu Sans"/>
-              </a:rPr>
-              <a:t> (</a:t>
-            </a:r>
-            <a:r>
-              <a:rPr b="0" lang="en-US" sz="2000" spc="-1" strike="noStrike">
-                <a:solidFill>
-                  <a:srgbClr val="464646"/>
-                </a:solidFill>
-                <a:latin typeface="Calibri"/>
-                <a:ea typeface="DejaVu Sans"/>
-              </a:rPr>
-              <a:t>ZIP code / Property location</a:t>
-            </a:r>
-            <a:r>
-              <a:rPr b="0" lang="en-US" sz="2200" spc="-1" strike="noStrike">
-                <a:solidFill>
-                  <a:srgbClr val="464646"/>
-                </a:solidFill>
-                <a:latin typeface="Calibri"/>
-                <a:ea typeface="DejaVu Sans"/>
-              </a:rPr>
-              <a:t>)</a:t>
-            </a:r>
-            <a:endParaRPr b="0" lang="en-US" sz="2200" spc="-1" strike="noStrike">
-              <a:latin typeface="Arial"/>
-            </a:endParaRPr>
-          </a:p>
-          <a:p>
-            <a:pPr marL="216000" indent="-216000">
-              <a:lnSpc>
-                <a:spcPct val="100000"/>
-              </a:lnSpc>
-              <a:buClr>
-                <a:srgbClr val="464646"/>
-              </a:buClr>
-              <a:buFont typeface="Symbol"/>
-              <a:buChar char=""/>
-            </a:pPr>
-            <a:r>
-              <a:rPr b="1" lang="en-US" sz="2200" spc="-1" strike="noStrike">
-                <a:solidFill>
-                  <a:srgbClr val="2a6099"/>
-                </a:solidFill>
-                <a:latin typeface="Calibri"/>
-                <a:ea typeface="DejaVu Sans"/>
-              </a:rPr>
-              <a:t>lat</a:t>
-            </a:r>
-            <a:r>
-              <a:rPr b="0" lang="en-US" sz="2200" spc="-1" strike="noStrike">
-                <a:solidFill>
-                  <a:srgbClr val="464646"/>
-                </a:solidFill>
-                <a:latin typeface="Calibri"/>
-                <a:ea typeface="DejaVu Sans"/>
-              </a:rPr>
-              <a:t> (</a:t>
-            </a:r>
-            <a:r>
-              <a:rPr b="0" lang="en-US" sz="2000" spc="-1" strike="noStrike">
-                <a:solidFill>
-                  <a:srgbClr val="464646"/>
-                </a:solidFill>
-                <a:latin typeface="Calibri"/>
-                <a:ea typeface="DejaVu Sans"/>
-              </a:rPr>
-              <a:t>Latitude</a:t>
-            </a:r>
-            <a:r>
-              <a:rPr b="0" lang="en-US" sz="2200" spc="-1" strike="noStrike">
-                <a:solidFill>
-                  <a:srgbClr val="464646"/>
-                </a:solidFill>
-                <a:latin typeface="Calibri"/>
-                <a:ea typeface="DejaVu Sans"/>
-              </a:rPr>
-              <a:t>)</a:t>
-            </a:r>
-            <a:endParaRPr b="0" lang="en-US" sz="2200" spc="-1" strike="noStrike">
-              <a:latin typeface="Arial"/>
-            </a:endParaRPr>
-          </a:p>
-          <a:p>
-            <a:pPr marL="216000" indent="-216000">
-              <a:lnSpc>
-                <a:spcPct val="100000"/>
-              </a:lnSpc>
-              <a:buClr>
-                <a:srgbClr val="464646"/>
-              </a:buClr>
-              <a:buFont typeface="Symbol"/>
-              <a:buChar char=""/>
-            </a:pPr>
-            <a:r>
-              <a:rPr b="1" lang="en-US" sz="2200" spc="-1" strike="noStrike">
-                <a:solidFill>
-                  <a:srgbClr val="2a6099"/>
-                </a:solidFill>
-                <a:latin typeface="Calibri"/>
-                <a:ea typeface="DejaVu Sans"/>
-              </a:rPr>
-              <a:t>long</a:t>
-            </a:r>
-            <a:r>
-              <a:rPr b="0" lang="en-US" sz="2200" spc="-1" strike="noStrike">
-                <a:solidFill>
-                  <a:srgbClr val="464646"/>
-                </a:solidFill>
-                <a:latin typeface="Calibri"/>
-                <a:ea typeface="DejaVu Sans"/>
-              </a:rPr>
-              <a:t> (</a:t>
-            </a:r>
-            <a:r>
-              <a:rPr b="0" lang="en-US" sz="2000" spc="-1" strike="noStrike">
-                <a:solidFill>
-                  <a:srgbClr val="464646"/>
-                </a:solidFill>
-                <a:latin typeface="Calibri"/>
-                <a:ea typeface="DejaVu Sans"/>
-              </a:rPr>
-              <a:t>Longitude</a:t>
-            </a:r>
-            <a:r>
-              <a:rPr b="0" lang="en-US" sz="2200" spc="-1" strike="noStrike">
-                <a:solidFill>
-                  <a:srgbClr val="464646"/>
-                </a:solidFill>
-                <a:latin typeface="Calibri"/>
-                <a:ea typeface="DejaVu Sans"/>
-              </a:rPr>
-              <a:t>)</a:t>
-            </a:r>
-            <a:endParaRPr b="0" lang="en-US" sz="2200" spc="-1" strike="noStrike">
-              <a:latin typeface="Arial"/>
-            </a:endParaRPr>
-          </a:p>
-          <a:p>
-            <a:pPr marL="216000" indent="-216000">
-              <a:lnSpc>
-                <a:spcPct val="100000"/>
-              </a:lnSpc>
-              <a:buClr>
-                <a:srgbClr val="464646"/>
-              </a:buClr>
-              <a:buFont typeface="Symbol"/>
-              <a:buChar char=""/>
-            </a:pPr>
-            <a:r>
-              <a:rPr b="1" lang="en-US" sz="2200" spc="-1" strike="noStrike">
-                <a:solidFill>
-                  <a:srgbClr val="2a6099"/>
-                </a:solidFill>
-                <a:latin typeface="Calibri"/>
-                <a:ea typeface="DejaVu Sans"/>
-              </a:rPr>
-              <a:t>sqft_living15</a:t>
-            </a:r>
-            <a:r>
-              <a:rPr b="0" lang="en-US" sz="2200" spc="-1" strike="noStrike">
-                <a:solidFill>
-                  <a:srgbClr val="464646"/>
-                </a:solidFill>
-                <a:latin typeface="Calibri"/>
-                <a:ea typeface="DejaVu Sans"/>
-              </a:rPr>
-              <a:t> (</a:t>
-            </a:r>
-            <a:r>
-              <a:rPr b="0" lang="en-US" sz="2000" spc="-1" strike="noStrike">
-                <a:solidFill>
-                  <a:srgbClr val="464646"/>
-                </a:solidFill>
-                <a:latin typeface="Calibri"/>
-                <a:ea typeface="DejaVu Sans"/>
-              </a:rPr>
-              <a:t>Average living area of the </a:t>
-            </a:r>
-            <a:endParaRPr b="0" lang="en-US" sz="2000" spc="-1" strike="noStrike">
-              <a:latin typeface="Arial"/>
-            </a:endParaRPr>
-          </a:p>
-          <a:p>
-            <a:pPr marL="216000" indent="-216000">
-              <a:lnSpc>
-                <a:spcPct val="100000"/>
-              </a:lnSpc>
-              <a:buClr>
-                <a:srgbClr val="464646"/>
-              </a:buClr>
-              <a:buFont typeface="Symbol"/>
-              <a:buChar char=""/>
-            </a:pPr>
-            <a:r>
-              <a:rPr b="0" lang="en-US" sz="2000" spc="-1" strike="noStrike">
-                <a:solidFill>
-                  <a:srgbClr val="464646"/>
-                </a:solidFill>
-                <a:latin typeface="Calibri"/>
-                <a:ea typeface="DejaVu Sans"/>
-              </a:rPr>
-              <a:t>15 nearest neighboring houses</a:t>
-            </a:r>
-            <a:r>
-              <a:rPr b="0" lang="en-US" sz="2200" spc="-1" strike="noStrike">
-                <a:solidFill>
-                  <a:srgbClr val="464646"/>
-                </a:solidFill>
-                <a:latin typeface="Calibri"/>
-                <a:ea typeface="DejaVu Sans"/>
-              </a:rPr>
-              <a:t>)</a:t>
-            </a:r>
-            <a:endParaRPr b="0" lang="en-US" sz="2200" spc="-1" strike="noStrike">
-              <a:latin typeface="Arial"/>
-            </a:endParaRPr>
-          </a:p>
-          <a:p>
-            <a:pPr marL="216000" indent="-216000">
-              <a:lnSpc>
-                <a:spcPct val="100000"/>
-              </a:lnSpc>
-              <a:buClr>
-                <a:srgbClr val="464646"/>
-              </a:buClr>
-              <a:buFont typeface="Symbol"/>
-              <a:buChar char=""/>
-            </a:pPr>
-            <a:r>
-              <a:rPr b="1" lang="en-US" sz="2200" spc="-1" strike="noStrike">
-                <a:solidFill>
-                  <a:srgbClr val="2a6099"/>
-                </a:solidFill>
-                <a:latin typeface="Calibri"/>
-                <a:ea typeface="DejaVu Sans"/>
-              </a:rPr>
-              <a:t>sqft_lot15</a:t>
-            </a:r>
-            <a:r>
-              <a:rPr b="0" lang="en-US" sz="2200" spc="-1" strike="noStrike">
-                <a:solidFill>
-                  <a:srgbClr val="464646"/>
-                </a:solidFill>
-                <a:latin typeface="Calibri"/>
-                <a:ea typeface="DejaVu Sans"/>
-              </a:rPr>
-              <a:t> (</a:t>
-            </a:r>
-            <a:r>
-              <a:rPr b="0" lang="en-US" sz="2000" spc="-1" strike="noStrike">
-                <a:solidFill>
-                  <a:srgbClr val="464646"/>
-                </a:solidFill>
-                <a:latin typeface="Calibri"/>
-                <a:ea typeface="DejaVu Sans"/>
-              </a:rPr>
-              <a:t>Average lot size of the </a:t>
-            </a:r>
-            <a:endParaRPr b="0" lang="en-US" sz="2000" spc="-1" strike="noStrike">
-              <a:latin typeface="Arial"/>
-            </a:endParaRPr>
-          </a:p>
-          <a:p>
-            <a:pPr marL="216000" indent="-216000">
-              <a:lnSpc>
-                <a:spcPct val="100000"/>
-              </a:lnSpc>
-              <a:buClr>
-                <a:srgbClr val="464646"/>
-              </a:buClr>
-              <a:buFont typeface="Symbol"/>
-              <a:buChar char=""/>
-            </a:pPr>
-            <a:r>
-              <a:rPr b="0" lang="en-US" sz="2000" spc="-1" strike="noStrike">
-                <a:solidFill>
-                  <a:srgbClr val="464646"/>
-                </a:solidFill>
-                <a:latin typeface="Calibri"/>
-                <a:ea typeface="DejaVu Sans"/>
-              </a:rPr>
-              <a:t>15 nearest neighboring houses</a:t>
-            </a:r>
-            <a:r>
-              <a:rPr b="0" lang="en-US" sz="2200" spc="-1" strike="noStrike">
-                <a:solidFill>
-                  <a:srgbClr val="464646"/>
-                </a:solidFill>
-                <a:latin typeface="Calibri"/>
-                <a:ea typeface="DejaVu Sans"/>
-              </a:rPr>
-              <a:t>)</a:t>
-            </a:r>
-            <a:endParaRPr b="0" lang="en-US" sz="2200" spc="-1" strike="noStrike">
-              <a:latin typeface="Arial"/>
-            </a:endParaRPr>
-          </a:p>
-          <a:p>
-            <a:pPr marL="216000" indent="-216000">
-              <a:lnSpc>
-                <a:spcPct val="100000"/>
-              </a:lnSpc>
-              <a:buClr>
-                <a:srgbClr val="464646"/>
-              </a:buClr>
-              <a:buFont typeface="Symbol"/>
-              <a:buChar char=""/>
-            </a:pPr>
-            <a:r>
-              <a:rPr b="1" lang="en-US" sz="2200" spc="-1" strike="noStrike">
-                <a:solidFill>
-                  <a:srgbClr val="2a6099"/>
-                </a:solidFill>
-                <a:latin typeface="Calibri"/>
-                <a:ea typeface="DejaVu Sans"/>
-              </a:rPr>
-              <a:t>date</a:t>
-            </a:r>
-            <a:r>
-              <a:rPr b="0" lang="en-US" sz="2200" spc="-1" strike="noStrike">
-                <a:solidFill>
-                  <a:srgbClr val="464646"/>
-                </a:solidFill>
-                <a:latin typeface="Calibri"/>
-                <a:ea typeface="DejaVu Sans"/>
-              </a:rPr>
-              <a:t> (</a:t>
-            </a:r>
-            <a:r>
-              <a:rPr b="0" lang="en-US" sz="2000" spc="-1" strike="noStrike">
-                <a:solidFill>
-                  <a:srgbClr val="464646"/>
-                </a:solidFill>
-                <a:latin typeface="Calibri"/>
-                <a:ea typeface="DejaVu Sans"/>
-              </a:rPr>
-              <a:t>Sale date</a:t>
-            </a:r>
-            <a:r>
-              <a:rPr b="0" lang="en-US" sz="2200" spc="-1" strike="noStrike">
-                <a:solidFill>
-                  <a:srgbClr val="464646"/>
-                </a:solidFill>
-                <a:latin typeface="Calibri"/>
-                <a:ea typeface="DejaVu Sans"/>
-              </a:rPr>
-              <a:t>)</a:t>
-            </a:r>
-            <a:endParaRPr b="0" lang="en-US" sz="2200" spc="-1" strike="noStrike">
-              <a:latin typeface="Arial"/>
-            </a:endParaRPr>
-          </a:p>
-          <a:p>
-            <a:pPr marL="216000" indent="-216000">
-              <a:lnSpc>
-                <a:spcPct val="100000"/>
-              </a:lnSpc>
-              <a:buClr>
-                <a:srgbClr val="464646"/>
-              </a:buClr>
-              <a:buFont typeface="Symbol"/>
-              <a:buChar char=""/>
-            </a:pPr>
-            <a:r>
-              <a:rPr b="1" lang="en-US" sz="2200" spc="-1" strike="noStrike">
-                <a:solidFill>
-                  <a:srgbClr val="2a6099"/>
-                </a:solidFill>
-                <a:latin typeface="Calibri"/>
-                <a:ea typeface="DejaVu Sans"/>
-              </a:rPr>
-              <a:t>price</a:t>
-            </a:r>
-            <a:r>
-              <a:rPr b="0" lang="en-US" sz="2200" spc="-1" strike="noStrike">
-                <a:solidFill>
-                  <a:srgbClr val="464646"/>
-                </a:solidFill>
-                <a:latin typeface="Calibri"/>
-                <a:ea typeface="DejaVu Sans"/>
-              </a:rPr>
-              <a:t> (</a:t>
-            </a:r>
-            <a:r>
-              <a:rPr b="0" lang="en-US" sz="2000" spc="-1" strike="noStrike">
-                <a:solidFill>
-                  <a:srgbClr val="464646"/>
-                </a:solidFill>
-                <a:latin typeface="Calibri"/>
-                <a:ea typeface="DejaVu Sans"/>
-              </a:rPr>
-              <a:t>Selling price</a:t>
-            </a:r>
-            <a:r>
-              <a:rPr b="0" lang="en-US" sz="2200" spc="-1" strike="noStrike">
-                <a:solidFill>
-                  <a:srgbClr val="464646"/>
-                </a:solidFill>
-                <a:latin typeface="Calibri"/>
-                <a:ea typeface="DejaVu Sans"/>
-              </a:rPr>
-              <a:t>)</a:t>
-            </a:r>
-            <a:endParaRPr b="0" lang="en-US" sz="2200" spc="-1" strike="noStrike">
-              <a:latin typeface="Arial"/>
-            </a:endParaRPr>
-          </a:p>
-        </p:txBody>
-      </p:sp>
-      <p:sp>
-        <p:nvSpPr>
-          <p:cNvPr id="144" name="TextBox 11"/>
-          <p:cNvSpPr/>
-          <p:nvPr/>
-        </p:nvSpPr>
-        <p:spPr>
-          <a:xfrm>
-            <a:off x="533880" y="1733400"/>
-            <a:ext cx="5305320" cy="3776400"/>
-          </a:xfrm>
-          <a:prstGeom prst="rect">
-            <a:avLst/>
-          </a:prstGeom>
-          <a:noFill/>
-          <a:ln w="0">
-            <a:noFill/>
-          </a:ln>
-        </p:spPr>
-        <p:style>
-          <a:lnRef idx="0"/>
-          <a:fillRef idx="0"/>
-          <a:effectRef idx="0"/>
-          <a:fontRef idx="minor"/>
-        </p:style>
-        <p:txBody>
-          <a:bodyPr wrap="none" lIns="90000" rIns="90000" tIns="45000" bIns="45000" anchor="t">
-            <a:spAutoFit/>
-          </a:bodyPr>
-          <a:p>
-            <a:pPr marL="216000" indent="-216000">
-              <a:lnSpc>
-                <a:spcPct val="100000"/>
-              </a:lnSpc>
-              <a:buClr>
-                <a:srgbClr val="464646"/>
-              </a:buClr>
-              <a:buFont typeface="Symbol"/>
-              <a:buChar char=""/>
-            </a:pPr>
-            <a:r>
-              <a:rPr b="1" lang="en-US" sz="2200" spc="-1" strike="noStrike">
-                <a:solidFill>
-                  <a:srgbClr val="2a6099"/>
-                </a:solidFill>
-                <a:highlight>
-                  <a:srgbClr val="ffffff"/>
-                </a:highlight>
-                <a:latin typeface="Calibri"/>
-                <a:ea typeface="DejaVu Sans"/>
-              </a:rPr>
-              <a:t>sqft_abov</a:t>
-            </a:r>
-            <a:r>
-              <a:rPr b="0" lang="en-US" sz="2200" spc="-1" strike="noStrike">
-                <a:solidFill>
-                  <a:srgbClr val="2a6099"/>
-                </a:solidFill>
-                <a:highlight>
-                  <a:srgbClr val="ffffff"/>
-                </a:highlight>
-                <a:latin typeface="Calibri"/>
-                <a:ea typeface="DejaVu Sans"/>
-              </a:rPr>
-              <a:t>e</a:t>
-            </a:r>
-            <a:r>
-              <a:rPr b="0" lang="en-US" sz="2200" spc="-1" strike="noStrike">
-                <a:solidFill>
-                  <a:srgbClr val="464646"/>
-                </a:solidFill>
-                <a:latin typeface="Calibri"/>
-                <a:ea typeface="DejaVu Sans"/>
-              </a:rPr>
-              <a:t> (</a:t>
-            </a:r>
-            <a:r>
-              <a:rPr b="0" lang="en-US" sz="2000" spc="-1" strike="noStrike">
-                <a:solidFill>
-                  <a:srgbClr val="464646"/>
-                </a:solidFill>
-                <a:latin typeface="Calibri"/>
-                <a:ea typeface="DejaVu Sans"/>
-              </a:rPr>
-              <a:t>Living area above ground</a:t>
-            </a:r>
-            <a:r>
-              <a:rPr b="0" lang="en-US" sz="2200" spc="-1" strike="noStrike">
-                <a:solidFill>
-                  <a:srgbClr val="464646"/>
-                </a:solidFill>
-                <a:latin typeface="Calibri"/>
-                <a:ea typeface="DejaVu Sans"/>
-              </a:rPr>
-              <a:t>)</a:t>
-            </a:r>
-            <a:endParaRPr b="0" lang="en-US" sz="2200" spc="-1" strike="noStrike">
-              <a:latin typeface="Arial"/>
-            </a:endParaRPr>
-          </a:p>
-          <a:p>
-            <a:pPr marL="216000" indent="-216000">
-              <a:lnSpc>
-                <a:spcPct val="100000"/>
-              </a:lnSpc>
-              <a:buClr>
-                <a:srgbClr val="464646"/>
-              </a:buClr>
-              <a:buFont typeface="Symbol"/>
-              <a:buChar char=""/>
-            </a:pPr>
-            <a:r>
-              <a:rPr b="1" lang="en-US" sz="2200" spc="-1" strike="noStrike">
-                <a:solidFill>
-                  <a:srgbClr val="2a6099"/>
-                </a:solidFill>
-                <a:latin typeface="Calibri"/>
-                <a:ea typeface="DejaVu Sans"/>
-              </a:rPr>
-              <a:t>bedrooms</a:t>
-            </a:r>
-            <a:r>
-              <a:rPr b="0" lang="en-US" sz="2200" spc="-1" strike="noStrike">
-                <a:solidFill>
-                  <a:srgbClr val="464646"/>
-                </a:solidFill>
-                <a:latin typeface="Calibri"/>
-                <a:ea typeface="DejaVu Sans"/>
-              </a:rPr>
-              <a:t> (</a:t>
-            </a:r>
-            <a:r>
-              <a:rPr b="0" lang="en-US" sz="2000" spc="-1" strike="noStrike">
-                <a:solidFill>
-                  <a:srgbClr val="464646"/>
-                </a:solidFill>
-                <a:latin typeface="Calibri"/>
-                <a:ea typeface="DejaVu Sans"/>
-              </a:rPr>
-              <a:t>Number of bedrooms</a:t>
-            </a:r>
-            <a:r>
-              <a:rPr b="0" lang="en-US" sz="2200" spc="-1" strike="noStrike">
-                <a:solidFill>
-                  <a:srgbClr val="464646"/>
-                </a:solidFill>
-                <a:latin typeface="Calibri"/>
-                <a:ea typeface="DejaVu Sans"/>
-              </a:rPr>
-              <a:t>)</a:t>
-            </a:r>
-            <a:endParaRPr b="0" lang="en-US" sz="2200" spc="-1" strike="noStrike">
-              <a:latin typeface="Arial"/>
-            </a:endParaRPr>
-          </a:p>
-          <a:p>
-            <a:pPr marL="216000" indent="-216000">
-              <a:lnSpc>
-                <a:spcPct val="100000"/>
-              </a:lnSpc>
-              <a:buClr>
-                <a:srgbClr val="464646"/>
-              </a:buClr>
-              <a:buFont typeface="Symbol"/>
-              <a:buChar char=""/>
-            </a:pPr>
-            <a:r>
-              <a:rPr b="1" lang="en-US" sz="2200" spc="-1" strike="noStrike">
-                <a:solidFill>
-                  <a:srgbClr val="2a6099"/>
-                </a:solidFill>
-                <a:latin typeface="Calibri"/>
-                <a:ea typeface="DejaVu Sans"/>
-              </a:rPr>
-              <a:t>bathrooms</a:t>
-            </a:r>
-            <a:r>
-              <a:rPr b="0" lang="en-US" sz="2200" spc="-1" strike="noStrike">
-                <a:solidFill>
-                  <a:srgbClr val="464646"/>
-                </a:solidFill>
-                <a:latin typeface="Calibri"/>
-                <a:ea typeface="DejaVu Sans"/>
-              </a:rPr>
-              <a:t> (</a:t>
-            </a:r>
-            <a:r>
-              <a:rPr b="0" lang="en-US" sz="2000" spc="-1" strike="noStrike">
-                <a:solidFill>
-                  <a:srgbClr val="464646"/>
-                </a:solidFill>
-                <a:latin typeface="Calibri"/>
-                <a:ea typeface="DejaVu Sans"/>
-              </a:rPr>
-              <a:t>Number of bathrooms</a:t>
-            </a:r>
-            <a:r>
-              <a:rPr b="0" lang="en-US" sz="2200" spc="-1" strike="noStrike">
-                <a:solidFill>
-                  <a:srgbClr val="464646"/>
-                </a:solidFill>
-                <a:latin typeface="Calibri"/>
-                <a:ea typeface="DejaVu Sans"/>
-              </a:rPr>
-              <a:t>)</a:t>
-            </a:r>
-            <a:endParaRPr b="0" lang="en-US" sz="2200" spc="-1" strike="noStrike">
-              <a:latin typeface="Arial"/>
-            </a:endParaRPr>
-          </a:p>
-          <a:p>
-            <a:pPr marL="216000" indent="-216000">
-              <a:lnSpc>
-                <a:spcPct val="100000"/>
-              </a:lnSpc>
-              <a:buClr>
-                <a:srgbClr val="464646"/>
-              </a:buClr>
-              <a:buFont typeface="Symbol"/>
-              <a:buChar char=""/>
-            </a:pPr>
-            <a:r>
-              <a:rPr b="1" lang="en-US" sz="2200" spc="-1" strike="noStrike">
-                <a:solidFill>
-                  <a:srgbClr val="2a6099"/>
-                </a:solidFill>
-                <a:latin typeface="Calibri"/>
-                <a:ea typeface="DejaVu Sans"/>
-              </a:rPr>
-              <a:t>sqft_living</a:t>
-            </a:r>
-            <a:r>
-              <a:rPr b="0" lang="en-US" sz="2200" spc="-1" strike="noStrike">
-                <a:solidFill>
-                  <a:srgbClr val="464646"/>
-                </a:solidFill>
-                <a:latin typeface="Calibri"/>
-                <a:ea typeface="DejaVu Sans"/>
-              </a:rPr>
-              <a:t> (</a:t>
-            </a:r>
-            <a:r>
-              <a:rPr b="0" lang="en-US" sz="2000" spc="-1" strike="noStrike">
-                <a:solidFill>
-                  <a:srgbClr val="464646"/>
-                </a:solidFill>
-                <a:latin typeface="Calibri"/>
-                <a:ea typeface="DejaVu Sans"/>
-              </a:rPr>
-              <a:t>Living area of the house</a:t>
-            </a:r>
-            <a:r>
-              <a:rPr b="0" lang="en-US" sz="2200" spc="-1" strike="noStrike">
-                <a:solidFill>
-                  <a:srgbClr val="464646"/>
-                </a:solidFill>
-                <a:latin typeface="Calibri"/>
-                <a:ea typeface="DejaVu Sans"/>
-              </a:rPr>
-              <a:t>)</a:t>
-            </a:r>
-            <a:endParaRPr b="0" lang="en-US" sz="2200" spc="-1" strike="noStrike">
-              <a:latin typeface="Arial"/>
-            </a:endParaRPr>
-          </a:p>
-          <a:p>
-            <a:pPr marL="216000" indent="-216000">
-              <a:lnSpc>
-                <a:spcPct val="100000"/>
-              </a:lnSpc>
-              <a:buClr>
-                <a:srgbClr val="464646"/>
-              </a:buClr>
-              <a:buFont typeface="Symbol"/>
-              <a:buChar char=""/>
-            </a:pPr>
-            <a:r>
-              <a:rPr b="1" lang="en-US" sz="2200" spc="-1" strike="noStrike">
-                <a:solidFill>
-                  <a:srgbClr val="2a6099"/>
-                </a:solidFill>
-                <a:latin typeface="Calibri"/>
-                <a:ea typeface="DejaVu Sans"/>
-              </a:rPr>
-              <a:t>sqft_lot</a:t>
-            </a:r>
-            <a:r>
-              <a:rPr b="0" lang="en-US" sz="2200" spc="-1" strike="noStrike">
-                <a:solidFill>
-                  <a:srgbClr val="464646"/>
-                </a:solidFill>
-                <a:latin typeface="Calibri"/>
-                <a:ea typeface="DejaVu Sans"/>
-              </a:rPr>
-              <a:t> (</a:t>
-            </a:r>
-            <a:r>
-              <a:rPr b="0" lang="en-US" sz="2000" spc="-1" strike="noStrike">
-                <a:solidFill>
-                  <a:srgbClr val="464646"/>
-                </a:solidFill>
-                <a:latin typeface="Calibri"/>
-                <a:ea typeface="DejaVu Sans"/>
-              </a:rPr>
-              <a:t>Total land area</a:t>
-            </a:r>
-            <a:r>
-              <a:rPr b="0" lang="en-US" sz="2200" spc="-1" strike="noStrike">
-                <a:solidFill>
-                  <a:srgbClr val="464646"/>
-                </a:solidFill>
-                <a:latin typeface="Calibri"/>
-                <a:ea typeface="DejaVu Sans"/>
-              </a:rPr>
-              <a:t>)</a:t>
-            </a:r>
-            <a:endParaRPr b="0" lang="en-US" sz="2200" spc="-1" strike="noStrike">
-              <a:latin typeface="Arial"/>
-            </a:endParaRPr>
-          </a:p>
-          <a:p>
-            <a:pPr marL="216000" indent="-216000">
-              <a:lnSpc>
-                <a:spcPct val="100000"/>
-              </a:lnSpc>
-              <a:buClr>
-                <a:srgbClr val="464646"/>
-              </a:buClr>
-              <a:buFont typeface="Symbol"/>
-              <a:buChar char=""/>
-            </a:pPr>
-            <a:r>
-              <a:rPr b="1" lang="en-US" sz="2200" spc="-1" strike="noStrike">
-                <a:solidFill>
-                  <a:srgbClr val="2a6099"/>
-                </a:solidFill>
-                <a:latin typeface="Calibri"/>
-                <a:ea typeface="DejaVu Sans"/>
-              </a:rPr>
-              <a:t>floors</a:t>
-            </a:r>
-            <a:r>
-              <a:rPr b="0" lang="en-US" sz="2200" spc="-1" strike="noStrike">
-                <a:solidFill>
-                  <a:srgbClr val="464646"/>
-                </a:solidFill>
-                <a:latin typeface="Calibri"/>
-                <a:ea typeface="DejaVu Sans"/>
-              </a:rPr>
-              <a:t> (</a:t>
-            </a:r>
-            <a:r>
-              <a:rPr b="0" lang="en-US" sz="2000" spc="-1" strike="noStrike">
-                <a:solidFill>
-                  <a:srgbClr val="464646"/>
-                </a:solidFill>
-                <a:latin typeface="Calibri"/>
-                <a:ea typeface="DejaVu Sans"/>
-              </a:rPr>
-              <a:t>Number of floors</a:t>
-            </a:r>
-            <a:r>
-              <a:rPr b="0" lang="en-US" sz="2200" spc="-1" strike="noStrike">
-                <a:solidFill>
-                  <a:srgbClr val="464646"/>
-                </a:solidFill>
-                <a:latin typeface="Calibri"/>
-                <a:ea typeface="DejaVu Sans"/>
-              </a:rPr>
-              <a:t>)</a:t>
-            </a:r>
-            <a:endParaRPr b="0" lang="en-US" sz="2200" spc="-1" strike="noStrike">
-              <a:latin typeface="Arial"/>
-            </a:endParaRPr>
-          </a:p>
-          <a:p>
-            <a:pPr marL="216000" indent="-216000">
-              <a:lnSpc>
-                <a:spcPct val="100000"/>
-              </a:lnSpc>
-              <a:buClr>
-                <a:srgbClr val="464646"/>
-              </a:buClr>
-              <a:buFont typeface="Symbol"/>
-              <a:buChar char=""/>
-            </a:pPr>
-            <a:r>
-              <a:rPr b="1" lang="en-US" sz="2200" spc="-1" strike="noStrike">
-                <a:solidFill>
-                  <a:srgbClr val="2a6099"/>
-                </a:solidFill>
-                <a:latin typeface="Calibri"/>
-                <a:ea typeface="DejaVu Sans"/>
-              </a:rPr>
-              <a:t>waterfront</a:t>
-            </a:r>
-            <a:r>
-              <a:rPr b="0" lang="en-US" sz="2200" spc="-1" strike="noStrike">
-                <a:solidFill>
-                  <a:srgbClr val="464646"/>
-                </a:solidFill>
-                <a:latin typeface="Calibri"/>
-                <a:ea typeface="DejaVu Sans"/>
-              </a:rPr>
-              <a:t> (</a:t>
-            </a:r>
-            <a:r>
-              <a:rPr b="0" lang="en-US" sz="2000" spc="-1" strike="noStrike">
-                <a:solidFill>
-                  <a:srgbClr val="464646"/>
-                </a:solidFill>
-                <a:latin typeface="Calibri"/>
-                <a:ea typeface="DejaVu Sans"/>
-              </a:rPr>
-              <a:t>Whether the house is on </a:t>
-            </a:r>
-            <a:endParaRPr b="0" lang="en-US" sz="2000" spc="-1" strike="noStrike">
-              <a:latin typeface="Arial"/>
-            </a:endParaRPr>
-          </a:p>
-          <a:p>
-            <a:pPr marL="216000" indent="-216000">
-              <a:lnSpc>
-                <a:spcPct val="100000"/>
-              </a:lnSpc>
-              <a:buClr>
-                <a:srgbClr val="464646"/>
-              </a:buClr>
-              <a:buFont typeface="Symbol"/>
-              <a:buChar char=""/>
-            </a:pPr>
-            <a:r>
-              <a:rPr b="0" lang="en-US" sz="2000" spc="-1" strike="noStrike">
-                <a:solidFill>
-                  <a:srgbClr val="464646"/>
-                </a:solidFill>
-                <a:latin typeface="Calibri"/>
-                <a:ea typeface="DejaVu Sans"/>
-              </a:rPr>
-              <a:t>the waterfront</a:t>
-            </a:r>
-            <a:r>
-              <a:rPr b="0" lang="en-US" sz="2200" spc="-1" strike="noStrike">
-                <a:solidFill>
-                  <a:srgbClr val="464646"/>
-                </a:solidFill>
-                <a:latin typeface="Calibri"/>
-                <a:ea typeface="DejaVu Sans"/>
-              </a:rPr>
-              <a:t>)</a:t>
-            </a:r>
-            <a:endParaRPr b="0" lang="en-US" sz="2200" spc="-1" strike="noStrike">
-              <a:latin typeface="Arial"/>
-            </a:endParaRPr>
-          </a:p>
-          <a:p>
-            <a:pPr marL="216000" indent="-216000">
-              <a:lnSpc>
-                <a:spcPct val="100000"/>
-              </a:lnSpc>
-              <a:buClr>
-                <a:srgbClr val="464646"/>
-              </a:buClr>
-              <a:buFont typeface="Symbol"/>
-              <a:buChar char=""/>
-            </a:pPr>
-            <a:r>
-              <a:rPr b="1" lang="en-US" sz="2200" spc="-1" strike="noStrike">
-                <a:solidFill>
-                  <a:srgbClr val="2a6099"/>
-                </a:solidFill>
-                <a:latin typeface="Calibri"/>
-                <a:ea typeface="DejaVu Sans"/>
-              </a:rPr>
-              <a:t>view</a:t>
-            </a:r>
-            <a:r>
-              <a:rPr b="0" lang="en-US" sz="2200" spc="-1" strike="noStrike">
-                <a:solidFill>
-                  <a:srgbClr val="464646"/>
-                </a:solidFill>
-                <a:latin typeface="Calibri"/>
-                <a:ea typeface="DejaVu Sans"/>
-              </a:rPr>
-              <a:t> (</a:t>
-            </a:r>
-            <a:r>
-              <a:rPr b="0" lang="en-US" sz="2000" spc="-1" strike="noStrike">
-                <a:solidFill>
-                  <a:srgbClr val="464646"/>
-                </a:solidFill>
-                <a:latin typeface="Calibri"/>
-                <a:ea typeface="DejaVu Sans"/>
-              </a:rPr>
-              <a:t>Quality of the view</a:t>
-            </a:r>
-            <a:r>
-              <a:rPr b="0" lang="en-US" sz="2200" spc="-1" strike="noStrike">
-                <a:solidFill>
-                  <a:srgbClr val="464646"/>
-                </a:solidFill>
-                <a:latin typeface="Calibri"/>
-                <a:ea typeface="DejaVu Sans"/>
-              </a:rPr>
-              <a:t>)</a:t>
-            </a:r>
-            <a:endParaRPr b="0" lang="en-US" sz="2200" spc="-1" strike="noStrike">
-              <a:latin typeface="Arial"/>
-            </a:endParaRPr>
-          </a:p>
-          <a:p>
-            <a:pPr marL="216000" indent="-216000">
-              <a:lnSpc>
-                <a:spcPct val="100000"/>
-              </a:lnSpc>
-              <a:buClr>
-                <a:srgbClr val="464646"/>
-              </a:buClr>
-              <a:buFont typeface="Symbol"/>
-              <a:buChar char=""/>
-            </a:pPr>
-            <a:r>
-              <a:rPr b="1" lang="en-US" sz="2200" spc="-1" strike="noStrike">
-                <a:solidFill>
-                  <a:srgbClr val="2a6099"/>
-                </a:solidFill>
-                <a:latin typeface="Calibri"/>
-                <a:ea typeface="DejaVu Sans"/>
-              </a:rPr>
-              <a:t>condition</a:t>
-            </a:r>
-            <a:r>
-              <a:rPr b="0" lang="en-US" sz="2200" spc="-1" strike="noStrike">
-                <a:solidFill>
-                  <a:srgbClr val="464646"/>
-                </a:solidFill>
-                <a:latin typeface="Calibri"/>
-                <a:ea typeface="DejaVu Sans"/>
-              </a:rPr>
-              <a:t> (</a:t>
-            </a:r>
-            <a:r>
-              <a:rPr b="0" lang="en-US" sz="2000" spc="-1" strike="noStrike">
-                <a:solidFill>
-                  <a:srgbClr val="464646"/>
-                </a:solidFill>
-                <a:latin typeface="Calibri"/>
-                <a:ea typeface="DejaVu Sans"/>
-              </a:rPr>
-              <a:t>Overall condition of the house</a:t>
-            </a:r>
-            <a:r>
-              <a:rPr b="0" lang="en-US" sz="2200" spc="-1" strike="noStrike">
-                <a:solidFill>
-                  <a:srgbClr val="464646"/>
-                </a:solidFill>
-                <a:latin typeface="Calibri"/>
-                <a:ea typeface="DejaVu Sans"/>
-              </a:rPr>
-              <a:t>)</a:t>
-            </a:r>
-            <a:endParaRPr b="0" lang="en-US" sz="2200" spc="-1" strike="noStrike">
-              <a:latin typeface="Arial"/>
-            </a:endParaRPr>
-          </a:p>
-          <a:p>
-            <a:pPr marL="216000" indent="-216000">
-              <a:lnSpc>
-                <a:spcPct val="100000"/>
-              </a:lnSpc>
-              <a:buClr>
-                <a:srgbClr val="464646"/>
-              </a:buClr>
-              <a:buFont typeface="Symbol"/>
-              <a:buChar char=""/>
-            </a:pPr>
-            <a:r>
-              <a:rPr b="1" lang="en-US" sz="2200" spc="-1" strike="noStrike">
-                <a:solidFill>
-                  <a:srgbClr val="2a6099"/>
-                </a:solidFill>
-                <a:latin typeface="Calibri"/>
-                <a:ea typeface="DejaVu Sans"/>
-              </a:rPr>
-              <a:t>grade</a:t>
-            </a:r>
-            <a:r>
-              <a:rPr b="0" lang="en-US" sz="2200" spc="-1" strike="noStrike">
-                <a:solidFill>
-                  <a:srgbClr val="464646"/>
-                </a:solidFill>
-                <a:latin typeface="Calibri"/>
-                <a:ea typeface="DejaVu Sans"/>
-              </a:rPr>
-              <a:t> (</a:t>
-            </a:r>
-            <a:r>
-              <a:rPr b="0" lang="en-US" sz="2000" spc="-1" strike="noStrike">
-                <a:solidFill>
-                  <a:srgbClr val="464646"/>
-                </a:solidFill>
-                <a:latin typeface="Calibri"/>
-                <a:ea typeface="DejaVu Sans"/>
-              </a:rPr>
-              <a:t>Overall construction and design quality</a:t>
-            </a:r>
-            <a:r>
-              <a:rPr b="0" lang="en-US" sz="2200" spc="-1" strike="noStrike">
-                <a:solidFill>
-                  <a:srgbClr val="464646"/>
-                </a:solidFill>
-                <a:latin typeface="Calibri"/>
-                <a:ea typeface="DejaVu Sans"/>
-              </a:rPr>
-              <a:t>)</a:t>
-            </a:r>
-            <a:endParaRPr b="0" lang="en-US" sz="2200" spc="-1" strike="noStrike">
+              <a:t>• What is the best time within the next year to sell?</a:t>
+            </a:r>
+            <a:endParaRPr b="0" lang="en-US" sz="2600" spc="-1" strike="noStrike">
               <a:latin typeface="Arial"/>
             </a:endParaRPr>
           </a:p>
@@ -11722,14 +9790,14 @@
       </p:grpSpPr>
       <p:sp>
         <p:nvSpPr>
-          <p:cNvPr id="145" name="Rectangle 3"/>
+          <p:cNvPr id="144" name="Rectangle 1"/>
           <p:cNvSpPr/>
           <p:nvPr/>
         </p:nvSpPr>
         <p:spPr>
           <a:xfrm>
             <a:off x="0" y="0"/>
-            <a:ext cx="12188160" cy="599400"/>
+            <a:ext cx="12187800" cy="599040"/>
           </a:xfrm>
           <a:prstGeom prst="rect">
             <a:avLst/>
@@ -11757,14 +9825,14 @@
       </p:sp>
       <p:sp>
         <p:nvSpPr>
-          <p:cNvPr id="146" name="TextBox 23"/>
+          <p:cNvPr id="145" name="TextBox 2"/>
           <p:cNvSpPr/>
           <p:nvPr/>
         </p:nvSpPr>
         <p:spPr>
           <a:xfrm>
-            <a:off x="3707640" y="109800"/>
-            <a:ext cx="4289760" cy="516240"/>
+            <a:off x="4856400" y="109800"/>
+            <a:ext cx="1988280" cy="516240"/>
           </a:xfrm>
           <a:prstGeom prst="rect">
             <a:avLst/>
@@ -11799,7 +9867,17 @@
                 <a:latin typeface="Calibri"/>
                 <a:ea typeface="DejaVu Sans"/>
               </a:rPr>
-              <a:t>Understanding the Data 1/2</a:t>
+              <a:t> </a:t>
+            </a:r>
+            <a:r>
+              <a:rPr b="1" lang="en-US" sz="2800" spc="-1" strike="noStrike">
+                <a:solidFill>
+                  <a:srgbClr val="ffffff"/>
+                </a:solidFill>
+                <a:latin typeface="Calibri"/>
+                <a:ea typeface="DejaVu Sans"/>
+              </a:rPr>
+              <a:t>Hypotheses</a:t>
             </a:r>
             <a:endParaRPr b="0" lang="en-US" sz="2800" spc="-1" strike="noStrike">
               <a:latin typeface="Arial"/>
@@ -11809,14 +9887,14 @@
       </p:sp>
       <p:sp>
         <p:nvSpPr>
-          <p:cNvPr id="147" name="Rounded Rectangle 6"/>
+          <p:cNvPr id="146" name="Rounded Rectangle 3"/>
           <p:cNvSpPr/>
           <p:nvPr/>
         </p:nvSpPr>
         <p:spPr>
           <a:xfrm>
             <a:off x="457200" y="914400"/>
-            <a:ext cx="10972080" cy="5302800"/>
+            <a:ext cx="10971720" cy="5302440"/>
           </a:xfrm>
           <a:prstGeom prst="roundRect">
             <a:avLst>
@@ -11849,14 +9927,14 @@
       </p:sp>
       <p:sp>
         <p:nvSpPr>
-          <p:cNvPr id="148" name="TextBox 24"/>
+          <p:cNvPr id="147" name="TextBox 4"/>
           <p:cNvSpPr/>
           <p:nvPr/>
         </p:nvSpPr>
         <p:spPr>
           <a:xfrm>
-            <a:off x="1375560" y="1656720"/>
-            <a:ext cx="2721240" cy="3441240"/>
+            <a:off x="631800" y="1836720"/>
+            <a:ext cx="10761840" cy="2465640"/>
           </a:xfrm>
           <a:prstGeom prst="rect">
             <a:avLst/>
@@ -11877,632 +9955,102 @@
             <a:spAutoFit/>
           </a:bodyPr>
           <a:p>
-            <a:pPr>
+            <a:pPr marL="216000" indent="-216000">
               <a:lnSpc>
-                <a:spcPct val="100000"/>
+                <a:spcPct val="150000"/>
               </a:lnSpc>
-              <a:buNone/>
+              <a:buClr>
+                <a:srgbClr val="464646"/>
+              </a:buClr>
+              <a:buFont typeface="Symbol"/>
+              <a:buChar char=""/>
             </a:pPr>
             <a:r>
-              <a:rPr b="0" lang="en-US" sz="2200" spc="-1" strike="noStrike">
+              <a:rPr b="0" lang="en-US" sz="2600" spc="-1" strike="noStrike">
                 <a:solidFill>
                   <a:srgbClr val="464646"/>
                 </a:solidFill>
                 <a:latin typeface="Calibri"/>
                 <a:ea typeface="DejaVu Sans"/>
               </a:rPr>
-              <a:t>bedrooms         float64</a:t>
-            </a:r>
-            <a:endParaRPr b="0" lang="en-US" sz="2200" spc="-1" strike="noStrike">
-              <a:latin typeface="Arial"/>
-            </a:endParaRPr>
-          </a:p>
-          <a:p>
-            <a:pPr>
+              <a:t>Houses in more desirable locations are expected to have higher selling prices.</a:t>
+            </a:r>
+            <a:endParaRPr b="0" lang="en-US" sz="2600" spc="-1" strike="noStrike">
+              <a:latin typeface="Arial"/>
+            </a:endParaRPr>
+          </a:p>
+          <a:p>
+            <a:pPr marL="216000" indent="-216000">
               <a:lnSpc>
-                <a:spcPct val="100000"/>
+                <a:spcPct val="150000"/>
               </a:lnSpc>
-              <a:buNone/>
+              <a:buClr>
+                <a:srgbClr val="464646"/>
+              </a:buClr>
+              <a:buFont typeface="Symbol"/>
+              <a:buChar char=""/>
             </a:pPr>
             <a:r>
-              <a:rPr b="0" lang="en-US" sz="2200" spc="-1" strike="noStrike">
+              <a:rPr b="0" lang="en-US" sz="2600" spc="-1" strike="noStrike">
                 <a:solidFill>
                   <a:srgbClr val="464646"/>
                 </a:solidFill>
                 <a:latin typeface="Calibri"/>
                 <a:ea typeface="DejaVu Sans"/>
               </a:rPr>
-              <a:t>bathrooms        float64</a:t>
-            </a:r>
-            <a:endParaRPr b="0" lang="en-US" sz="2200" spc="-1" strike="noStrike">
-              <a:latin typeface="Arial"/>
-            </a:endParaRPr>
-          </a:p>
-          <a:p>
-            <a:pPr>
+              <a:t>Houses with a higher grade are expected to sell for higher prices.</a:t>
+            </a:r>
+            <a:endParaRPr b="0" lang="en-US" sz="2600" spc="-1" strike="noStrike">
+              <a:latin typeface="Arial"/>
+            </a:endParaRPr>
+          </a:p>
+          <a:p>
+            <a:pPr marL="216000" indent="-216000">
               <a:lnSpc>
-                <a:spcPct val="100000"/>
+                <a:spcPct val="150000"/>
               </a:lnSpc>
-              <a:buNone/>
+              <a:buClr>
+                <a:srgbClr val="464646"/>
+              </a:buClr>
+              <a:buFont typeface="Symbol"/>
+              <a:buChar char=""/>
             </a:pPr>
             <a:r>
-              <a:rPr b="0" lang="en-US" sz="2200" spc="-1" strike="noStrike">
+              <a:rPr b="0" lang="en-US" sz="2600" spc="-1" strike="noStrike">
                 <a:solidFill>
                   <a:srgbClr val="464646"/>
                 </a:solidFill>
                 <a:latin typeface="Calibri"/>
                 <a:ea typeface="DejaVu Sans"/>
               </a:rPr>
-              <a:t>sqft_living         float64</a:t>
-            </a:r>
-            <a:endParaRPr b="0" lang="en-US" sz="2200" spc="-1" strike="noStrike">
-              <a:latin typeface="Arial"/>
-            </a:endParaRPr>
-          </a:p>
-          <a:p>
-            <a:pPr>
+              <a:t>Renovated houses are expected to achieve higher selling prices.</a:t>
+            </a:r>
+            <a:endParaRPr b="0" lang="en-US" sz="2600" spc="-1" strike="noStrike">
+              <a:latin typeface="Arial"/>
+            </a:endParaRPr>
+          </a:p>
+          <a:p>
+            <a:pPr marL="216000" indent="-216000">
               <a:lnSpc>
-                <a:spcPct val="100000"/>
+                <a:spcPct val="150000"/>
               </a:lnSpc>
-              <a:buNone/>
+              <a:buClr>
+                <a:srgbClr val="464646"/>
+              </a:buClr>
+              <a:buFont typeface="Symbol"/>
+              <a:buChar char=""/>
             </a:pPr>
             <a:r>
-              <a:rPr b="0" lang="en-US" sz="2200" spc="-1" strike="noStrike">
+              <a:rPr b="0" lang="en-US" sz="2600" spc="-1" strike="noStrike">
                 <a:solidFill>
                   <a:srgbClr val="464646"/>
                 </a:solidFill>
                 <a:latin typeface="Calibri"/>
                 <a:ea typeface="DejaVu Sans"/>
               </a:rPr>
-              <a:t>sqft_lot             float64</a:t>
-            </a:r>
-            <a:endParaRPr b="0" lang="en-US" sz="2200" spc="-1" strike="noStrike">
-              <a:latin typeface="Arial"/>
-            </a:endParaRPr>
-          </a:p>
-          <a:p>
-            <a:pPr>
-              <a:lnSpc>
-                <a:spcPct val="100000"/>
-              </a:lnSpc>
-              <a:buNone/>
-            </a:pPr>
-            <a:r>
-              <a:rPr b="0" lang="en-US" sz="2200" spc="-1" strike="noStrike">
-                <a:solidFill>
-                  <a:srgbClr val="464646"/>
-                </a:solidFill>
-                <a:latin typeface="Calibri"/>
-                <a:ea typeface="DejaVu Sans"/>
-              </a:rPr>
-              <a:t>floors                 float64</a:t>
-            </a:r>
-            <a:endParaRPr b="0" lang="en-US" sz="2200" spc="-1" strike="noStrike">
-              <a:latin typeface="Arial"/>
-            </a:endParaRPr>
-          </a:p>
-          <a:p>
-            <a:pPr>
-              <a:lnSpc>
-                <a:spcPct val="100000"/>
-              </a:lnSpc>
-              <a:buNone/>
-            </a:pPr>
-            <a:r>
-              <a:rPr b="0" lang="en-US" sz="2200" spc="-1" strike="noStrike">
-                <a:solidFill>
-                  <a:srgbClr val="464646"/>
-                </a:solidFill>
-                <a:latin typeface="Calibri"/>
-                <a:ea typeface="DejaVu Sans"/>
-              </a:rPr>
-              <a:t>waterfront        float64</a:t>
-            </a:r>
-            <a:endParaRPr b="0" lang="en-US" sz="2200" spc="-1" strike="noStrike">
-              <a:latin typeface="Arial"/>
-            </a:endParaRPr>
-          </a:p>
-          <a:p>
-            <a:pPr>
-              <a:lnSpc>
-                <a:spcPct val="100000"/>
-              </a:lnSpc>
-              <a:buNone/>
-            </a:pPr>
-            <a:r>
-              <a:rPr b="0" lang="en-US" sz="2200" spc="-1" strike="noStrike">
-                <a:solidFill>
-                  <a:srgbClr val="464646"/>
-                </a:solidFill>
-                <a:latin typeface="Calibri"/>
-                <a:ea typeface="DejaVu Sans"/>
-              </a:rPr>
-              <a:t>view                   float64</a:t>
-            </a:r>
-            <a:endParaRPr b="0" lang="en-US" sz="2200" spc="-1" strike="noStrike">
-              <a:latin typeface="Arial"/>
-            </a:endParaRPr>
-          </a:p>
-          <a:p>
-            <a:pPr>
-              <a:lnSpc>
-                <a:spcPct val="100000"/>
-              </a:lnSpc>
-              <a:buNone/>
-            </a:pPr>
-            <a:r>
-              <a:rPr b="0" lang="en-US" sz="2200" spc="-1" strike="noStrike">
-                <a:solidFill>
-                  <a:srgbClr val="464646"/>
-                </a:solidFill>
-                <a:latin typeface="Calibri"/>
-                <a:ea typeface="DejaVu Sans"/>
-              </a:rPr>
-              <a:t>condition          int64</a:t>
-            </a:r>
-            <a:endParaRPr b="0" lang="en-US" sz="2200" spc="-1" strike="noStrike">
-              <a:latin typeface="Arial"/>
-            </a:endParaRPr>
-          </a:p>
-          <a:p>
-            <a:pPr>
-              <a:lnSpc>
-                <a:spcPct val="100000"/>
-              </a:lnSpc>
-              <a:buNone/>
-            </a:pPr>
-            <a:r>
-              <a:rPr b="0" lang="en-US" sz="2200" spc="-1" strike="noStrike">
-                <a:solidFill>
-                  <a:srgbClr val="464646"/>
-                </a:solidFill>
-                <a:latin typeface="Calibri"/>
-                <a:ea typeface="DejaVu Sans"/>
-              </a:rPr>
-              <a:t>grade                 int64</a:t>
-            </a:r>
-            <a:endParaRPr b="0" lang="en-US" sz="2200" spc="-1" strike="noStrike">
-              <a:latin typeface="Arial"/>
-            </a:endParaRPr>
-          </a:p>
-          <a:p>
-            <a:pPr>
-              <a:lnSpc>
-                <a:spcPct val="100000"/>
-              </a:lnSpc>
-              <a:buNone/>
-            </a:pPr>
-            <a:r>
-              <a:rPr b="0" lang="en-US" sz="2200" spc="-1" strike="noStrike">
-                <a:solidFill>
-                  <a:srgbClr val="464646"/>
-                </a:solidFill>
-                <a:latin typeface="Calibri"/>
-                <a:ea typeface="DejaVu Sans"/>
-              </a:rPr>
-              <a:t>sqft_above       float64</a:t>
-            </a:r>
-            <a:endParaRPr b="0" lang="en-US" sz="2200" spc="-1" strike="noStrike">
-              <a:latin typeface="Arial"/>
-            </a:endParaRPr>
-          </a:p>
-        </p:txBody>
-      </p:sp>
-      <p:sp>
-        <p:nvSpPr>
-          <p:cNvPr id="149" name="TextBox 25"/>
-          <p:cNvSpPr/>
-          <p:nvPr/>
-        </p:nvSpPr>
-        <p:spPr>
-          <a:xfrm>
-            <a:off x="7077240" y="1620720"/>
-            <a:ext cx="3054960" cy="3441240"/>
-          </a:xfrm>
-          <a:prstGeom prst="rect">
-            <a:avLst/>
-          </a:prstGeom>
-          <a:noFill/>
-          <a:ln w="0">
-            <a:noFill/>
-          </a:ln>
-        </p:spPr>
-        <p:style>
-          <a:lnRef idx="0"/>
-          <a:fillRef idx="0"/>
-          <a:effectRef idx="0"/>
-          <a:fontRef idx="minor"/>
-        </p:style>
-        <p:txBody>
-          <a:bodyPr wrap="none" lIns="90000" rIns="90000" tIns="45000" bIns="45000" anchor="t">
-            <a:spAutoFit/>
-          </a:bodyPr>
-          <a:p>
-            <a:pPr>
-              <a:lnSpc>
-                <a:spcPct val="100000"/>
-              </a:lnSpc>
-              <a:buNone/>
-            </a:pPr>
-            <a:r>
-              <a:rPr b="0" lang="en-US" sz="2200" spc="-1" strike="noStrike">
-                <a:solidFill>
-                  <a:srgbClr val="464646"/>
-                </a:solidFill>
-                <a:latin typeface="Calibri"/>
-                <a:ea typeface="DejaVu Sans"/>
-              </a:rPr>
-              <a:t>sqft_basement     float64</a:t>
-            </a:r>
-            <a:endParaRPr b="0" lang="en-US" sz="2200" spc="-1" strike="noStrike">
-              <a:latin typeface="Arial"/>
-            </a:endParaRPr>
-          </a:p>
-          <a:p>
-            <a:pPr>
-              <a:lnSpc>
-                <a:spcPct val="100000"/>
-              </a:lnSpc>
-              <a:buNone/>
-            </a:pPr>
-            <a:r>
-              <a:rPr b="0" lang="en-US" sz="2200" spc="-1" strike="noStrike">
-                <a:solidFill>
-                  <a:srgbClr val="464646"/>
-                </a:solidFill>
-                <a:latin typeface="Calibri"/>
-                <a:ea typeface="DejaVu Sans"/>
-              </a:rPr>
-              <a:t>yr_built                  int64</a:t>
-            </a:r>
-            <a:endParaRPr b="0" lang="en-US" sz="2200" spc="-1" strike="noStrike">
-              <a:latin typeface="Arial"/>
-            </a:endParaRPr>
-          </a:p>
-          <a:p>
-            <a:pPr>
-              <a:lnSpc>
-                <a:spcPct val="100000"/>
-              </a:lnSpc>
-              <a:buNone/>
-            </a:pPr>
-            <a:r>
-              <a:rPr b="0" lang="en-US" sz="2200" spc="-1" strike="noStrike">
-                <a:solidFill>
-                  <a:srgbClr val="464646"/>
-                </a:solidFill>
-                <a:latin typeface="Calibri"/>
-                <a:ea typeface="DejaVu Sans"/>
-              </a:rPr>
-              <a:t>yr_renovated        float64</a:t>
-            </a:r>
-            <a:endParaRPr b="0" lang="en-US" sz="2200" spc="-1" strike="noStrike">
-              <a:latin typeface="Arial"/>
-            </a:endParaRPr>
-          </a:p>
-          <a:p>
-            <a:pPr>
-              <a:lnSpc>
-                <a:spcPct val="100000"/>
-              </a:lnSpc>
-              <a:buNone/>
-            </a:pPr>
-            <a:r>
-              <a:rPr b="0" lang="en-US" sz="2200" spc="-1" strike="noStrike">
-                <a:solidFill>
-                  <a:srgbClr val="464646"/>
-                </a:solidFill>
-                <a:latin typeface="Calibri"/>
-                <a:ea typeface="DejaVu Sans"/>
-              </a:rPr>
-              <a:t>zipcode                   int64</a:t>
-            </a:r>
-            <a:endParaRPr b="0" lang="en-US" sz="2200" spc="-1" strike="noStrike">
-              <a:latin typeface="Arial"/>
-            </a:endParaRPr>
-          </a:p>
-          <a:p>
-            <a:pPr>
-              <a:lnSpc>
-                <a:spcPct val="100000"/>
-              </a:lnSpc>
-              <a:buNone/>
-            </a:pPr>
-            <a:r>
-              <a:rPr b="0" lang="en-US" sz="2200" spc="-1" strike="noStrike">
-                <a:solidFill>
-                  <a:srgbClr val="464646"/>
-                </a:solidFill>
-                <a:latin typeface="Calibri"/>
-                <a:ea typeface="DejaVu Sans"/>
-              </a:rPr>
-              <a:t>lat                            float64</a:t>
-            </a:r>
-            <a:endParaRPr b="0" lang="en-US" sz="2200" spc="-1" strike="noStrike">
-              <a:latin typeface="Arial"/>
-            </a:endParaRPr>
-          </a:p>
-          <a:p>
-            <a:pPr>
-              <a:lnSpc>
-                <a:spcPct val="100000"/>
-              </a:lnSpc>
-              <a:buNone/>
-            </a:pPr>
-            <a:r>
-              <a:rPr b="0" lang="en-US" sz="2200" spc="-1" strike="noStrike">
-                <a:solidFill>
-                  <a:srgbClr val="464646"/>
-                </a:solidFill>
-                <a:latin typeface="Calibri"/>
-                <a:ea typeface="DejaVu Sans"/>
-              </a:rPr>
-              <a:t>long                         float64</a:t>
-            </a:r>
-            <a:endParaRPr b="0" lang="en-US" sz="2200" spc="-1" strike="noStrike">
-              <a:latin typeface="Arial"/>
-            </a:endParaRPr>
-          </a:p>
-          <a:p>
-            <a:pPr>
-              <a:lnSpc>
-                <a:spcPct val="100000"/>
-              </a:lnSpc>
-              <a:buNone/>
-            </a:pPr>
-            <a:r>
-              <a:rPr b="0" lang="en-US" sz="2200" spc="-1" strike="noStrike">
-                <a:solidFill>
-                  <a:srgbClr val="464646"/>
-                </a:solidFill>
-                <a:latin typeface="Calibri"/>
-                <a:ea typeface="DejaVu Sans"/>
-              </a:rPr>
-              <a:t>sqft_living15          float64</a:t>
-            </a:r>
-            <a:endParaRPr b="0" lang="en-US" sz="2200" spc="-1" strike="noStrike">
-              <a:latin typeface="Arial"/>
-            </a:endParaRPr>
-          </a:p>
-          <a:p>
-            <a:pPr>
-              <a:lnSpc>
-                <a:spcPct val="100000"/>
-              </a:lnSpc>
-              <a:buNone/>
-            </a:pPr>
-            <a:r>
-              <a:rPr b="0" lang="en-US" sz="2200" spc="-1" strike="noStrike">
-                <a:solidFill>
-                  <a:srgbClr val="464646"/>
-                </a:solidFill>
-                <a:latin typeface="Calibri"/>
-                <a:ea typeface="DejaVu Sans"/>
-              </a:rPr>
-              <a:t>sqft_lot15              float64</a:t>
-            </a:r>
-            <a:endParaRPr b="0" lang="en-US" sz="2200" spc="-1" strike="noStrike">
-              <a:latin typeface="Arial"/>
-            </a:endParaRPr>
-          </a:p>
-          <a:p>
-            <a:pPr>
-              <a:lnSpc>
-                <a:spcPct val="100000"/>
-              </a:lnSpc>
-              <a:buNone/>
-            </a:pPr>
-            <a:r>
-              <a:rPr b="0" lang="en-US" sz="2200" spc="-1" strike="noStrike">
-                <a:solidFill>
-                  <a:srgbClr val="464646"/>
-                </a:solidFill>
-                <a:latin typeface="Calibri"/>
-                <a:ea typeface="DejaVu Sans"/>
-              </a:rPr>
-              <a:t>date                         object</a:t>
-            </a:r>
-            <a:endParaRPr b="0" lang="en-US" sz="2200" spc="-1" strike="noStrike">
-              <a:latin typeface="Arial"/>
-            </a:endParaRPr>
-          </a:p>
-          <a:p>
-            <a:pPr>
-              <a:lnSpc>
-                <a:spcPct val="100000"/>
-              </a:lnSpc>
-              <a:buNone/>
-            </a:pPr>
-            <a:r>
-              <a:rPr b="0" lang="en-US" sz="2200" spc="-1" strike="noStrike">
-                <a:solidFill>
-                  <a:srgbClr val="464646"/>
-                </a:solidFill>
-                <a:latin typeface="Calibri"/>
-                <a:ea typeface="DejaVu Sans"/>
-              </a:rPr>
-              <a:t>price                        float64</a:t>
-            </a:r>
-            <a:endParaRPr b="0" lang="en-US" sz="2200" spc="-1" strike="noStrike">
-              <a:latin typeface="Arial"/>
-            </a:endParaRPr>
-          </a:p>
-        </p:txBody>
-      </p:sp>
-      <p:sp>
-        <p:nvSpPr>
-          <p:cNvPr id="150" name="TextBox 26"/>
-          <p:cNvSpPr/>
-          <p:nvPr/>
-        </p:nvSpPr>
-        <p:spPr>
-          <a:xfrm>
-            <a:off x="2383560" y="1008720"/>
-            <a:ext cx="2721240" cy="3441600"/>
-          </a:xfrm>
-          <a:prstGeom prst="rect">
-            <a:avLst/>
-          </a:prstGeom>
-          <a:noFill/>
-          <a:ln w="0">
-            <a:noFill/>
-          </a:ln>
-        </p:spPr>
-        <p:style>
-          <a:lnRef idx="0"/>
-          <a:fillRef idx="0"/>
-          <a:effectRef idx="0"/>
-          <a:fontRef idx="minor"/>
-        </p:style>
-      </p:sp>
-      <p:sp>
-        <p:nvSpPr>
-          <p:cNvPr id="151" name=""/>
-          <p:cNvSpPr/>
-          <p:nvPr/>
-        </p:nvSpPr>
-        <p:spPr>
-          <a:xfrm>
-            <a:off x="4739040" y="1198800"/>
-            <a:ext cx="2624400" cy="699840"/>
-          </a:xfrm>
-          <a:prstGeom prst="rect">
-            <a:avLst/>
-          </a:prstGeom>
-          <a:noFill/>
-          <a:ln w="0">
-            <a:noFill/>
-          </a:ln>
-        </p:spPr>
-        <p:style>
-          <a:lnRef idx="0"/>
-          <a:fillRef idx="0"/>
-          <a:effectRef idx="0"/>
-          <a:fontRef idx="minor"/>
-        </p:style>
-        <p:txBody>
-          <a:bodyPr lIns="90000" rIns="90000" tIns="45000" bIns="45000" anchor="t">
-            <a:noAutofit/>
-          </a:bodyPr>
-          <a:p>
-            <a:pPr algn="ctr">
-              <a:lnSpc>
-                <a:spcPct val="100000"/>
-              </a:lnSpc>
-              <a:buNone/>
-            </a:pPr>
-            <a:r>
-              <a:rPr b="1" lang="en-US" sz="2600" spc="-1" strike="noStrike">
-                <a:solidFill>
-                  <a:srgbClr val="464646"/>
-                </a:solidFill>
-                <a:latin typeface="Calibri"/>
-              </a:rPr>
-              <a:t>Data Types</a:t>
+              <a:t>Selling date affects price.</a:t>
             </a:r>
             <a:endParaRPr b="0" lang="en-US" sz="2600" spc="-1" strike="noStrike">
-              <a:latin typeface="Arial"/>
-            </a:endParaRPr>
-          </a:p>
-        </p:txBody>
-      </p:sp>
-      <p:sp>
-        <p:nvSpPr>
-          <p:cNvPr id="152" name="TextBox 27"/>
-          <p:cNvSpPr/>
-          <p:nvPr/>
-        </p:nvSpPr>
-        <p:spPr>
-          <a:xfrm>
-            <a:off x="2098080" y="5328720"/>
-            <a:ext cx="7684200" cy="474840"/>
-          </a:xfrm>
-          <a:prstGeom prst="rect">
-            <a:avLst/>
-          </a:prstGeom>
-          <a:noFill/>
-          <a:ln w="0">
-            <a:noFill/>
-          </a:ln>
-        </p:spPr>
-        <p:style>
-          <a:lnRef idx="0"/>
-          <a:fillRef idx="0"/>
-          <a:effectRef idx="0"/>
-          <a:fontRef idx="minor"/>
-        </p:style>
-        <p:txBody>
-          <a:bodyPr wrap="none" lIns="90000" rIns="90000" tIns="45000" bIns="45000" anchor="t">
-            <a:spAutoFit/>
-          </a:bodyPr>
-          <a:p>
-            <a:pPr>
-              <a:lnSpc>
-                <a:spcPct val="115000"/>
-              </a:lnSpc>
-              <a:buNone/>
-            </a:pPr>
-            <a:r>
-              <a:rPr b="1" lang="en-US" sz="2200" spc="-1" strike="noStrike">
-                <a:solidFill>
-                  <a:srgbClr val="464646"/>
-                </a:solidFill>
-                <a:latin typeface="Calibri"/>
-                <a:ea typeface="DejaVu Sans"/>
-              </a:rPr>
-              <a:t>15</a:t>
-            </a:r>
-            <a:r>
-              <a:rPr b="0" lang="en-US" sz="2200" spc="-1" strike="noStrike">
-                <a:solidFill>
-                  <a:srgbClr val="464646"/>
-                </a:solidFill>
-                <a:latin typeface="Calibri"/>
-                <a:ea typeface="DejaVu Sans"/>
-              </a:rPr>
-              <a:t> floating-point variables,   </a:t>
-            </a:r>
-            <a:r>
-              <a:rPr b="1" lang="en-US" sz="2200" spc="-1" strike="noStrike">
-                <a:solidFill>
-                  <a:srgbClr val="464646"/>
-                </a:solidFill>
-                <a:latin typeface="Calibri"/>
-                <a:ea typeface="DejaVu Sans"/>
-              </a:rPr>
-              <a:t>5</a:t>
-            </a:r>
-            <a:r>
-              <a:rPr b="0" lang="en-US" sz="2200" spc="-1" strike="noStrike">
-                <a:solidFill>
-                  <a:srgbClr val="464646"/>
-                </a:solidFill>
-                <a:latin typeface="Calibri"/>
-                <a:ea typeface="DejaVu Sans"/>
-              </a:rPr>
-              <a:t> integer variables,    </a:t>
-            </a:r>
-            <a:r>
-              <a:rPr b="1" lang="en-US" sz="2200" spc="-1" strike="noStrike">
-                <a:solidFill>
-                  <a:srgbClr val="464646"/>
-                </a:solidFill>
-                <a:latin typeface="Calibri"/>
-                <a:ea typeface="DejaVu Sans"/>
-              </a:rPr>
-              <a:t>1</a:t>
-            </a:r>
-            <a:r>
-              <a:rPr b="0" lang="en-US" sz="2200" spc="-1" strike="noStrike">
-                <a:solidFill>
-                  <a:srgbClr val="464646"/>
-                </a:solidFill>
-                <a:latin typeface="Calibri"/>
-                <a:ea typeface="DejaVu Sans"/>
-              </a:rPr>
-              <a:t> string variable)</a:t>
-            </a:r>
-            <a:endParaRPr b="0" lang="en-US" sz="2200" spc="-1" strike="noStrike">
               <a:latin typeface="Arial"/>
             </a:endParaRPr>
           </a:p>
@@ -12547,14 +10095,14 @@
       </p:grpSpPr>
       <p:sp>
         <p:nvSpPr>
-          <p:cNvPr id="153" name="Rectangle 1"/>
+          <p:cNvPr id="148" name="Rectangle 1"/>
           <p:cNvSpPr/>
           <p:nvPr/>
         </p:nvSpPr>
         <p:spPr>
           <a:xfrm>
             <a:off x="0" y="0"/>
-            <a:ext cx="12188160" cy="599400"/>
+            <a:ext cx="12187800" cy="599040"/>
           </a:xfrm>
           <a:prstGeom prst="rect">
             <a:avLst/>
@@ -12582,14 +10130,14 @@
       </p:sp>
       <p:sp>
         <p:nvSpPr>
-          <p:cNvPr id="154" name="TextBox 2"/>
+          <p:cNvPr id="149" name="TextBox 2"/>
           <p:cNvSpPr/>
           <p:nvPr/>
         </p:nvSpPr>
         <p:spPr>
           <a:xfrm>
-            <a:off x="4002840" y="109800"/>
-            <a:ext cx="3698280" cy="516240"/>
+            <a:off x="4839120" y="109800"/>
+            <a:ext cx="2026800" cy="516240"/>
           </a:xfrm>
           <a:prstGeom prst="rect">
             <a:avLst/>
@@ -12624,7 +10172,7 @@
                 <a:latin typeface="Calibri"/>
                 <a:ea typeface="DejaVu Sans"/>
               </a:rPr>
-              <a:t>Understanding the Data</a:t>
+              <a:t>EDA Primary</a:t>
             </a:r>
             <a:endParaRPr b="0" lang="en-US" sz="2800" spc="-1" strike="noStrike">
               <a:latin typeface="Arial"/>
@@ -12634,14 +10182,14 @@
       </p:sp>
       <p:sp>
         <p:nvSpPr>
-          <p:cNvPr id="155" name="Rounded Rectangle 3"/>
+          <p:cNvPr id="150" name="Rounded Rectangle 3"/>
           <p:cNvSpPr/>
           <p:nvPr/>
         </p:nvSpPr>
         <p:spPr>
           <a:xfrm>
             <a:off x="457200" y="914400"/>
-            <a:ext cx="10972080" cy="5302800"/>
+            <a:ext cx="10971720" cy="5302440"/>
           </a:xfrm>
           <a:prstGeom prst="roundRect">
             <a:avLst>
@@ -12674,14 +10222,14 @@
       </p:sp>
       <p:sp>
         <p:nvSpPr>
-          <p:cNvPr id="156" name="TextBox 14"/>
+          <p:cNvPr id="151" name="TextBox 4"/>
           <p:cNvSpPr/>
           <p:nvPr/>
         </p:nvSpPr>
         <p:spPr>
           <a:xfrm>
-            <a:off x="7279920" y="2340720"/>
-            <a:ext cx="2505600" cy="1815480"/>
+            <a:off x="4599360" y="1188720"/>
+            <a:ext cx="2321640" cy="1765440"/>
           </a:xfrm>
           <a:prstGeom prst="rect">
             <a:avLst/>
@@ -12708,37 +10256,6 @@
               </a:lnSpc>
               <a:buNone/>
             </a:pPr>
-            <a:r>
-              <a:rPr b="1" lang="en-US" sz="2200" spc="-1" strike="noStrike">
-                <a:solidFill>
-                  <a:srgbClr val="464646"/>
-                </a:solidFill>
-                <a:latin typeface="Calibri"/>
-                <a:ea typeface="DejaVu Sans"/>
-              </a:rPr>
-              <a:t>Missing values:</a:t>
-            </a:r>
-            <a:endParaRPr b="0" lang="en-US" sz="2200" spc="-1" strike="noStrike">
-              <a:latin typeface="Arial"/>
-            </a:endParaRPr>
-          </a:p>
-          <a:p>
-            <a:pPr>
-              <a:lnSpc>
-                <a:spcPct val="115000"/>
-              </a:lnSpc>
-              <a:buNone/>
-            </a:pPr>
-            <a:r>
-              <a:rPr b="1" lang="en-US" sz="2200" spc="-1" strike="noStrike">
-                <a:solidFill>
-                  <a:srgbClr val="464646"/>
-                </a:solidFill>
-                <a:latin typeface="Calibri"/>
-                <a:ea typeface="DejaVu Sans"/>
-              </a:rPr>
-              <a:t>waterfront</a:t>
-            </a:r>
             <a:r>
               <a:rPr b="0" lang="en-US" sz="2200" spc="-1" strike="noStrike">
                 <a:solidFill>
@@ -12747,7 +10264,7 @@
                 <a:latin typeface="Calibri"/>
                 <a:ea typeface="DejaVu Sans"/>
               </a:rPr>
-              <a:t>: 2,391</a:t>
+              <a:t>Data Cleaning</a:t>
             </a:r>
             <a:endParaRPr b="0" lang="en-US" sz="2200" spc="-1" strike="noStrike">
               <a:latin typeface="Arial"/>
@@ -12760,16 +10277,6 @@
               </a:lnSpc>
               <a:buNone/>
             </a:pPr>
-            <a:r>
-              <a:rPr b="1" lang="en-US" sz="2200" spc="-1" strike="noStrike">
-                <a:solidFill>
-                  <a:srgbClr val="464646"/>
-                </a:solidFill>
-                <a:latin typeface="Calibri"/>
-                <a:ea typeface="DejaVu Sans"/>
-              </a:rPr>
-              <a:t>view</a:t>
-            </a:r>
             <a:r>
               <a:rPr b="0" lang="en-US" sz="2200" spc="-1" strike="noStrike">
                 <a:solidFill>
@@ -12778,7 +10285,7 @@
                 <a:latin typeface="Calibri"/>
                 <a:ea typeface="DejaVu Sans"/>
               </a:rPr>
-              <a:t>: 63</a:t>
+              <a:t>Univariate Analysis</a:t>
             </a:r>
             <a:endParaRPr b="0" lang="en-US" sz="2200" spc="-1" strike="noStrike">
               <a:latin typeface="Arial"/>
@@ -12791,16 +10298,6 @@
               </a:lnSpc>
               <a:buNone/>
             </a:pPr>
-            <a:r>
-              <a:rPr b="1" lang="en-US" sz="2200" spc="-1" strike="noStrike">
-                <a:solidFill>
-                  <a:srgbClr val="464646"/>
-                </a:solidFill>
-                <a:latin typeface="Calibri"/>
-                <a:ea typeface="DejaVu Sans"/>
-              </a:rPr>
-              <a:t>sqft_basement</a:t>
-            </a:r>
             <a:r>
               <a:rPr b="0" lang="en-US" sz="2200" spc="-1" strike="noStrike">
                 <a:solidFill>
@@ -12809,7 +10306,7 @@
                 <a:latin typeface="Calibri"/>
                 <a:ea typeface="DejaVu Sans"/>
               </a:rPr>
-              <a:t>: 452</a:t>
+              <a:t>Bivariate Analysis</a:t>
             </a:r>
             <a:endParaRPr b="0" lang="en-US" sz="2200" spc="-1" strike="noStrike">
               <a:latin typeface="Arial"/>
@@ -12822,16 +10319,6 @@
               </a:lnSpc>
               <a:buNone/>
             </a:pPr>
-            <a:r>
-              <a:rPr b="1" lang="en-US" sz="2200" spc="-1" strike="noStrike">
-                <a:solidFill>
-                  <a:srgbClr val="464646"/>
-                </a:solidFill>
-                <a:latin typeface="Calibri"/>
-                <a:ea typeface="DejaVu Sans"/>
-              </a:rPr>
-              <a:t>yr_renovated</a:t>
-            </a:r>
             <a:r>
               <a:rPr b="0" lang="en-US" sz="2200" spc="-1" strike="noStrike">
                 <a:solidFill>
@@ -12840,43 +10327,12 @@
                 <a:latin typeface="Calibri"/>
                 <a:ea typeface="DejaVu Sans"/>
               </a:rPr>
-              <a:t>: 3,848</a:t>
+              <a:t>Correlation</a:t>
             </a:r>
             <a:endParaRPr b="0" lang="en-US" sz="2200" spc="-1" strike="noStrike">
               <a:latin typeface="Arial"/>
             </a:endParaRPr>
           </a:p>
-        </p:txBody>
-      </p:sp>
-      <p:sp>
-        <p:nvSpPr>
-          <p:cNvPr id="157" name="TextBox 16"/>
-          <p:cNvSpPr/>
-          <p:nvPr/>
-        </p:nvSpPr>
-        <p:spPr>
-          <a:xfrm>
-            <a:off x="1156680" y="2391480"/>
-            <a:ext cx="4693320" cy="2100600"/>
-          </a:xfrm>
-          <a:prstGeom prst="rect">
-            <a:avLst/>
-          </a:prstGeom>
-          <a:noFill/>
-          <a:ln w="0">
-            <a:noFill/>
-          </a:ln>
-        </p:spPr>
-        <p:style>
-          <a:lnRef idx="0"/>
-          <a:fillRef idx="0"/>
-          <a:effectRef idx="0"/>
-          <a:fontRef idx="minor"/>
-        </p:style>
-        <p:txBody>
-          <a:bodyPr wrap="none" lIns="90000" rIns="90000" tIns="45000" bIns="45000" anchor="t">
-            <a:spAutoFit/>
-          </a:bodyPr>
           <a:p>
             <a:pPr>
               <a:lnSpc>
@@ -12884,16 +10340,6 @@
               </a:lnSpc>
               <a:buNone/>
             </a:pPr>
-            <a:r>
-              <a:rPr b="1" lang="en-US" sz="2200" spc="-1" strike="noStrike">
-                <a:solidFill>
-                  <a:srgbClr val="464646"/>
-                </a:solidFill>
-                <a:latin typeface="Calibri"/>
-                <a:ea typeface="DejaVu Sans"/>
-              </a:rPr>
-              <a:t>Dataset name</a:t>
-            </a:r>
             <a:r>
               <a:rPr b="0" lang="en-US" sz="2200" spc="-1" strike="noStrike">
                 <a:solidFill>
@@ -12902,123 +10348,8 @@
                 <a:latin typeface="Calibri"/>
                 <a:ea typeface="DejaVu Sans"/>
               </a:rPr>
-              <a:t>: King County House Sales</a:t>
-            </a:r>
-            <a:endParaRPr b="0" lang="en-US" sz="2200" spc="-1" strike="noStrike">
-              <a:latin typeface="Arial"/>
-            </a:endParaRPr>
-          </a:p>
-          <a:p>
-            <a:pPr>
-              <a:lnSpc>
-                <a:spcPct val="100000"/>
-              </a:lnSpc>
-              <a:buNone/>
-            </a:pPr>
-            <a:r>
-              <a:rPr b="1" lang="en-US" sz="2200" spc="-1" strike="noStrike">
-                <a:solidFill>
-                  <a:srgbClr val="464646"/>
-                </a:solidFill>
-                <a:latin typeface="Calibri"/>
-                <a:ea typeface="DejaVu Sans"/>
-              </a:rPr>
-              <a:t>Number of rows</a:t>
-            </a:r>
-            <a:r>
-              <a:rPr b="0" lang="en-US" sz="2200" spc="-1" strike="noStrike">
-                <a:solidFill>
-                  <a:srgbClr val="464646"/>
-                </a:solidFill>
-                <a:latin typeface="Calibri"/>
-                <a:ea typeface="DejaVu Sans"/>
-              </a:rPr>
-              <a:t>: 21,597</a:t>
-            </a:r>
-            <a:endParaRPr b="0" lang="en-US" sz="2200" spc="-1" strike="noStrike">
-              <a:latin typeface="Arial"/>
-            </a:endParaRPr>
-          </a:p>
-          <a:p>
-            <a:pPr>
-              <a:lnSpc>
-                <a:spcPct val="100000"/>
-              </a:lnSpc>
-              <a:buNone/>
-            </a:pPr>
-            <a:r>
-              <a:rPr b="1" lang="en-US" sz="2200" spc="-1" strike="noStrike">
-                <a:solidFill>
-                  <a:srgbClr val="464646"/>
-                </a:solidFill>
-                <a:latin typeface="Calibri"/>
-                <a:ea typeface="DejaVu Sans"/>
-              </a:rPr>
-              <a:t>Number of columns</a:t>
-            </a:r>
-            <a:r>
-              <a:rPr b="0" lang="en-US" sz="2200" spc="-1" strike="noStrike">
-                <a:solidFill>
-                  <a:srgbClr val="464646"/>
-                </a:solidFill>
-                <a:latin typeface="Calibri"/>
-                <a:ea typeface="DejaVu Sans"/>
-              </a:rPr>
-              <a:t>: 21</a:t>
-            </a:r>
-            <a:endParaRPr b="0" lang="en-US" sz="2200" spc="-1" strike="noStrike">
-              <a:latin typeface="Arial"/>
-            </a:endParaRPr>
-          </a:p>
-          <a:p>
-            <a:pPr>
-              <a:lnSpc>
-                <a:spcPct val="100000"/>
-              </a:lnSpc>
-              <a:buNone/>
-            </a:pPr>
-            <a:r>
-              <a:rPr b="1" lang="en-US" sz="2200" spc="-1" strike="noStrike">
-                <a:solidFill>
-                  <a:srgbClr val="464646"/>
-                </a:solidFill>
-                <a:latin typeface="Calibri"/>
-                <a:ea typeface="DejaVu Sans"/>
-              </a:rPr>
-              <a:t>Target variable</a:t>
-            </a:r>
-            <a:r>
-              <a:rPr b="0" lang="en-US" sz="2200" spc="-1" strike="noStrike">
-                <a:solidFill>
-                  <a:srgbClr val="464646"/>
-                </a:solidFill>
-                <a:latin typeface="Calibri"/>
-                <a:ea typeface="DejaVu Sans"/>
-              </a:rPr>
-              <a:t>: price</a:t>
-            </a:r>
-            <a:endParaRPr b="0" lang="en-US" sz="2200" spc="-1" strike="noStrike">
-              <a:latin typeface="Arial"/>
-            </a:endParaRPr>
-          </a:p>
-          <a:p>
-            <a:pPr>
-              <a:lnSpc>
-                <a:spcPct val="100000"/>
-              </a:lnSpc>
-              <a:buNone/>
-            </a:pPr>
-            <a:endParaRPr b="0" lang="en-US" sz="2200" spc="-1" strike="noStrike">
-              <a:latin typeface="Arial"/>
-            </a:endParaRPr>
-          </a:p>
-          <a:p>
-            <a:pPr>
-              <a:lnSpc>
-                <a:spcPct val="100000"/>
-              </a:lnSpc>
-              <a:buNone/>
-            </a:pPr>
+              <a:t>Business Insights</a:t>
+            </a:r>
             <a:endParaRPr b="0" lang="en-US" sz="2200" spc="-1" strike="noStrike">
               <a:latin typeface="Arial"/>
             </a:endParaRPr>
@@ -13064,14 +10395,14 @@
       </p:grpSpPr>
       <p:sp>
         <p:nvSpPr>
-          <p:cNvPr id="158" name="Rectangle 1"/>
+          <p:cNvPr id="152" name="Rectangle 5"/>
           <p:cNvSpPr/>
           <p:nvPr/>
         </p:nvSpPr>
         <p:spPr>
           <a:xfrm>
             <a:off x="0" y="0"/>
-            <a:ext cx="12188160" cy="599400"/>
+            <a:ext cx="12187800" cy="599040"/>
           </a:xfrm>
           <a:prstGeom prst="rect">
             <a:avLst/>
@@ -13099,14 +10430,14 @@
       </p:sp>
       <p:sp>
         <p:nvSpPr>
-          <p:cNvPr id="159" name="TextBox 2"/>
+          <p:cNvPr id="153" name="TextBox 6"/>
           <p:cNvSpPr/>
           <p:nvPr/>
         </p:nvSpPr>
         <p:spPr>
           <a:xfrm>
-            <a:off x="4315680" y="109800"/>
-            <a:ext cx="3071880" cy="516240"/>
+            <a:off x="4144320" y="109800"/>
+            <a:ext cx="3414240" cy="516240"/>
           </a:xfrm>
           <a:prstGeom prst="rect">
             <a:avLst/>
@@ -13141,7 +10472,7 @@
                 <a:latin typeface="Calibri"/>
                 <a:ea typeface="DejaVu Sans"/>
               </a:rPr>
-              <a:t>Research Questions</a:t>
+              <a:t>Expected Deliverables</a:t>
             </a:r>
             <a:endParaRPr b="0" lang="en-US" sz="2800" spc="-1" strike="noStrike">
               <a:latin typeface="Arial"/>
@@ -13151,14 +10482,14 @@
       </p:sp>
       <p:sp>
         <p:nvSpPr>
-          <p:cNvPr id="160" name="Rounded Rectangle 3"/>
+          <p:cNvPr id="154" name="Rounded Rectangle 2"/>
           <p:cNvSpPr/>
           <p:nvPr/>
         </p:nvSpPr>
         <p:spPr>
           <a:xfrm>
             <a:off x="457200" y="914400"/>
-            <a:ext cx="10972080" cy="5302800"/>
+            <a:ext cx="10971720" cy="5302440"/>
           </a:xfrm>
           <a:prstGeom prst="roundRect">
             <a:avLst>
@@ -13191,14 +10522,14 @@
       </p:sp>
       <p:sp>
         <p:nvSpPr>
-          <p:cNvPr id="161" name="TextBox 4"/>
+          <p:cNvPr id="155" name="TextBox 8"/>
           <p:cNvSpPr/>
           <p:nvPr/>
         </p:nvSpPr>
         <p:spPr>
           <a:xfrm>
-            <a:off x="2211120" y="2268720"/>
-            <a:ext cx="7098120" cy="2465640"/>
+            <a:off x="4239720" y="1188720"/>
+            <a:ext cx="3040920" cy="1095120"/>
           </a:xfrm>
           <a:prstGeom prst="rect">
             <a:avLst/>
@@ -13221,73 +10552,63 @@
           <a:p>
             <a:pPr>
               <a:lnSpc>
-                <a:spcPct val="150000"/>
+                <a:spcPct val="100000"/>
               </a:lnSpc>
-              <a:spcBef>
-                <a:spcPts val="439"/>
-              </a:spcBef>
               <a:buNone/>
             </a:pPr>
             <a:r>
-              <a:rPr b="0" lang="en-US" sz="2600" spc="-1" strike="noStrike">
+              <a:rPr b="0" lang="en-US" sz="2200" spc="-1" strike="noStrike">
                 <a:solidFill>
-                  <a:srgbClr val="000000"/>
+                  <a:srgbClr val="464646"/>
                 </a:solidFill>
                 <a:latin typeface="Calibri"/>
                 <a:ea typeface="DejaVu Sans"/>
               </a:rPr>
-              <a:t>• </a:t>
-            </a:r>
-            <a:r>
-              <a:rPr b="0" lang="en-US" sz="2600" spc="-1" strike="noStrike">
+              <a:t>Pricing strategy</a:t>
+            </a:r>
+            <a:endParaRPr b="0" lang="en-US" sz="2200" spc="-1" strike="noStrike">
+              <a:latin typeface="Arial"/>
+            </a:endParaRPr>
+          </a:p>
+          <a:p>
+            <a:pPr>
+              <a:lnSpc>
+                <a:spcPct val="100000"/>
+              </a:lnSpc>
+              <a:buNone/>
+            </a:pPr>
+            <a:r>
+              <a:rPr b="0" lang="en-US" sz="2200" spc="-1" strike="noStrike">
                 <a:solidFill>
-                  <a:srgbClr val="000000"/>
+                  <a:srgbClr val="464646"/>
                 </a:solidFill>
                 <a:latin typeface="Calibri"/>
                 <a:ea typeface="DejaVu Sans"/>
               </a:rPr>
-              <a:t>Does grade affect house prices?</a:t>
-            </a:r>
-            <a:br>
-              <a:rPr sz="2600"/>
-            </a:br>
-            <a:r>
-              <a:rPr b="0" lang="en-US" sz="2600" spc="-1" strike="noStrike">
+              <a:t>Renovation strategy</a:t>
+            </a:r>
+            <a:endParaRPr b="0" lang="en-US" sz="2200" spc="-1" strike="noStrike">
+              <a:latin typeface="Arial"/>
+            </a:endParaRPr>
+          </a:p>
+          <a:p>
+            <a:pPr>
+              <a:lnSpc>
+                <a:spcPct val="100000"/>
+              </a:lnSpc>
+              <a:buNone/>
+            </a:pPr>
+            <a:r>
+              <a:rPr b="0" lang="en-US" sz="2200" spc="-1" strike="noStrike">
                 <a:solidFill>
-                  <a:srgbClr val="000000"/>
+                  <a:srgbClr val="464646"/>
                 </a:solidFill>
                 <a:latin typeface="Calibri"/>
                 <a:ea typeface="DejaVu Sans"/>
               </a:rPr>
-              <a:t>• Should houses be renovated before selling?</a:t>
-            </a:r>
-            <a:br>
-              <a:rPr sz="2600"/>
-            </a:br>
-            <a:r>
-              <a:rPr b="0" lang="en-US" sz="2600" spc="-1" strike="noStrike">
-                <a:solidFill>
-                  <a:srgbClr val="000000"/>
-                </a:solidFill>
-                <a:latin typeface="Calibri"/>
-                <a:ea typeface="DejaVu Sans"/>
-              </a:rPr>
-              <a:t>• Does location affect house prices?</a:t>
-            </a:r>
-            <a:br>
-              <a:rPr sz="2600"/>
-            </a:br>
-            <a:r>
-              <a:rPr b="0" lang="en-US" sz="2600" spc="-1" strike="noStrike">
-                <a:solidFill>
-                  <a:srgbClr val="000000"/>
-                </a:solidFill>
-                <a:latin typeface="Calibri"/>
-                <a:ea typeface="DejaVu Sans"/>
-              </a:rPr>
-              <a:t>• What is the best time within the next year to sell?</a:t>
-            </a:r>
-            <a:endParaRPr b="0" lang="en-US" sz="2600" spc="-1" strike="noStrike">
+              <a:t>Selling recommendations</a:t>
+            </a:r>
+            <a:endParaRPr b="0" lang="en-US" sz="2200" spc="-1" strike="noStrike">
               <a:latin typeface="Arial"/>
             </a:endParaRPr>
           </a:p>
@@ -13332,14 +10653,14 @@
       </p:grpSpPr>
       <p:sp>
         <p:nvSpPr>
-          <p:cNvPr id="162" name="Rectangle 1"/>
+          <p:cNvPr id="156" name="Rectangle 2"/>
           <p:cNvSpPr/>
           <p:nvPr/>
         </p:nvSpPr>
         <p:spPr>
           <a:xfrm>
             <a:off x="0" y="0"/>
-            <a:ext cx="12188160" cy="599400"/>
+            <a:ext cx="12187800" cy="599040"/>
           </a:xfrm>
           <a:prstGeom prst="rect">
             <a:avLst/>
@@ -13367,14 +10688,14 @@
       </p:sp>
       <p:sp>
         <p:nvSpPr>
-          <p:cNvPr id="163" name="TextBox 2"/>
+          <p:cNvPr id="157" name="TextBox 3"/>
           <p:cNvSpPr/>
           <p:nvPr/>
         </p:nvSpPr>
         <p:spPr>
           <a:xfrm>
-            <a:off x="4506480" y="109800"/>
-            <a:ext cx="2690640" cy="516240"/>
+            <a:off x="5001480" y="109800"/>
+            <a:ext cx="1699920" cy="516240"/>
           </a:xfrm>
           <a:prstGeom prst="rect">
             <a:avLst/>
@@ -13409,7 +10730,7 @@
                 <a:latin typeface="Calibri"/>
                 <a:ea typeface="DejaVu Sans"/>
               </a:rPr>
-              <a:t>Final Hypotheses</a:t>
+              <a:t>Thank You</a:t>
             </a:r>
             <a:endParaRPr b="0" lang="en-US" sz="2800" spc="-1" strike="noStrike">
               <a:latin typeface="Arial"/>
@@ -13419,14 +10740,14 @@
       </p:sp>
       <p:sp>
         <p:nvSpPr>
-          <p:cNvPr id="164" name="Rounded Rectangle 3"/>
+          <p:cNvPr id="158" name="Rounded Rectangle 1"/>
           <p:cNvSpPr/>
           <p:nvPr/>
         </p:nvSpPr>
         <p:spPr>
           <a:xfrm>
             <a:off x="457200" y="914400"/>
-            <a:ext cx="10972080" cy="5302800"/>
+            <a:ext cx="10971720" cy="5302440"/>
           </a:xfrm>
           <a:prstGeom prst="roundRect">
             <a:avLst>
@@ -13459,14 +10780,14 @@
       </p:sp>
       <p:sp>
         <p:nvSpPr>
-          <p:cNvPr id="165" name="TextBox 4"/>
+          <p:cNvPr id="159" name="TextBox 5"/>
           <p:cNvSpPr/>
           <p:nvPr/>
         </p:nvSpPr>
         <p:spPr>
           <a:xfrm>
-            <a:off x="631800" y="1836720"/>
-            <a:ext cx="10761840" cy="2465640"/>
+            <a:off x="5036040" y="1188720"/>
+            <a:ext cx="1448280" cy="424800"/>
           </a:xfrm>
           <a:prstGeom prst="rect">
             <a:avLst/>
@@ -13487,102 +10808,23 @@
             <a:spAutoFit/>
           </a:bodyPr>
           <a:p>
-            <a:pPr marL="216000" indent="-216000">
+            <a:pPr>
               <a:lnSpc>
-                <a:spcPct val="150000"/>
+                <a:spcPct val="100000"/>
               </a:lnSpc>
-              <a:buClr>
-                <a:srgbClr val="464646"/>
-              </a:buClr>
-              <a:buFont typeface="Symbol"/>
-              <a:buChar char=""/>
+              <a:buNone/>
             </a:pPr>
             <a:r>
-              <a:rPr b="0" lang="en-US" sz="2600" spc="-1" strike="noStrike">
+              <a:rPr b="0" lang="en-US" sz="2200" spc="-1" strike="noStrike">
                 <a:solidFill>
                   <a:srgbClr val="464646"/>
                 </a:solidFill>
                 <a:latin typeface="Calibri"/>
                 <a:ea typeface="DejaVu Sans"/>
               </a:rPr>
-              <a:t>Houses in more desirable locations are expected to have higher selling prices.</a:t>
-            </a:r>
-            <a:endParaRPr b="0" lang="en-US" sz="2600" spc="-1" strike="noStrike">
-              <a:latin typeface="Arial"/>
-            </a:endParaRPr>
-          </a:p>
-          <a:p>
-            <a:pPr marL="216000" indent="-216000">
-              <a:lnSpc>
-                <a:spcPct val="150000"/>
-              </a:lnSpc>
-              <a:buClr>
-                <a:srgbClr val="464646"/>
-              </a:buClr>
-              <a:buFont typeface="Symbol"/>
-              <a:buChar char=""/>
-            </a:pPr>
-            <a:r>
-              <a:rPr b="0" lang="en-US" sz="2600" spc="-1" strike="noStrike">
-                <a:solidFill>
-                  <a:srgbClr val="464646"/>
-                </a:solidFill>
-                <a:latin typeface="Calibri"/>
-                <a:ea typeface="DejaVu Sans"/>
-              </a:rPr>
-              <a:t>Houses with a higher grade are expected to sell for higher prices.</a:t>
-            </a:r>
-            <a:endParaRPr b="0" lang="en-US" sz="2600" spc="-1" strike="noStrike">
-              <a:latin typeface="Arial"/>
-            </a:endParaRPr>
-          </a:p>
-          <a:p>
-            <a:pPr marL="216000" indent="-216000">
-              <a:lnSpc>
-                <a:spcPct val="150000"/>
-              </a:lnSpc>
-              <a:buClr>
-                <a:srgbClr val="464646"/>
-              </a:buClr>
-              <a:buFont typeface="Symbol"/>
-              <a:buChar char=""/>
-            </a:pPr>
-            <a:r>
-              <a:rPr b="0" lang="en-US" sz="2600" spc="-1" strike="noStrike">
-                <a:solidFill>
-                  <a:srgbClr val="464646"/>
-                </a:solidFill>
-                <a:latin typeface="Calibri"/>
-                <a:ea typeface="DejaVu Sans"/>
-              </a:rPr>
-              <a:t>Renovated houses are expected to achieve higher selling prices.</a:t>
-            </a:r>
-            <a:endParaRPr b="0" lang="en-US" sz="2600" spc="-1" strike="noStrike">
-              <a:latin typeface="Arial"/>
-            </a:endParaRPr>
-          </a:p>
-          <a:p>
-            <a:pPr marL="216000" indent="-216000">
-              <a:lnSpc>
-                <a:spcPct val="150000"/>
-              </a:lnSpc>
-              <a:buClr>
-                <a:srgbClr val="464646"/>
-              </a:buClr>
-              <a:buFont typeface="Symbol"/>
-              <a:buChar char=""/>
-            </a:pPr>
-            <a:r>
-              <a:rPr b="0" lang="en-US" sz="2600" spc="-1" strike="noStrike">
-                <a:solidFill>
-                  <a:srgbClr val="464646"/>
-                </a:solidFill>
-                <a:latin typeface="Calibri"/>
-                <a:ea typeface="DejaVu Sans"/>
-              </a:rPr>
-              <a:t>Selling date affects price.</a:t>
-            </a:r>
-            <a:endParaRPr b="0" lang="en-US" sz="2600" spc="-1" strike="noStrike">
+              <a:t>Questions?</a:t>
+            </a:r>
+            <a:endParaRPr b="0" lang="en-US" sz="2200" spc="-1" strike="noStrike">
               <a:latin typeface="Arial"/>
             </a:endParaRPr>
           </a:p>
